--- a/Lesmateriaal/Slides/CySec – les 4 - Database en JWT.pptx
+++ b/Lesmateriaal/Slides/CySec – les 4 - Database en JWT.pptx
@@ -5,7 +5,7 @@
     <p:sldMasterId id="2147483648" r:id="rId1"/>
   </p:sldMasterIdLst>
   <p:notesMasterIdLst>
-    <p:notesMasterId r:id="rId41"/>
+    <p:notesMasterId r:id="rId23"/>
   </p:notesMasterIdLst>
   <p:sldIdLst>
     <p:sldId id="256" r:id="rId2"/>
@@ -14,39 +14,21 @@
     <p:sldId id="272" r:id="rId5"/>
     <p:sldId id="258" r:id="rId6"/>
     <p:sldId id="259" r:id="rId7"/>
-    <p:sldId id="281" r:id="rId8"/>
-    <p:sldId id="282" r:id="rId9"/>
-    <p:sldId id="268" r:id="rId10"/>
-    <p:sldId id="283" r:id="rId11"/>
-    <p:sldId id="265" r:id="rId12"/>
-    <p:sldId id="284" r:id="rId13"/>
-    <p:sldId id="273" r:id="rId14"/>
-    <p:sldId id="286" r:id="rId15"/>
-    <p:sldId id="274" r:id="rId16"/>
-    <p:sldId id="285" r:id="rId17"/>
-    <p:sldId id="275" r:id="rId18"/>
-    <p:sldId id="287" r:id="rId19"/>
-    <p:sldId id="276" r:id="rId20"/>
-    <p:sldId id="288" r:id="rId21"/>
-    <p:sldId id="277" r:id="rId22"/>
-    <p:sldId id="289" r:id="rId23"/>
-    <p:sldId id="269" r:id="rId24"/>
-    <p:sldId id="290" r:id="rId25"/>
-    <p:sldId id="270" r:id="rId26"/>
-    <p:sldId id="291" r:id="rId27"/>
-    <p:sldId id="278" r:id="rId28"/>
-    <p:sldId id="292" r:id="rId29"/>
-    <p:sldId id="279" r:id="rId30"/>
-    <p:sldId id="293" r:id="rId31"/>
-    <p:sldId id="262" r:id="rId32"/>
-    <p:sldId id="294" r:id="rId33"/>
-    <p:sldId id="280" r:id="rId34"/>
-    <p:sldId id="295" r:id="rId35"/>
-    <p:sldId id="263" r:id="rId36"/>
-    <p:sldId id="271" r:id="rId37"/>
-    <p:sldId id="297" r:id="rId38"/>
-    <p:sldId id="266" r:id="rId39"/>
-    <p:sldId id="267" r:id="rId40"/>
+    <p:sldId id="265" r:id="rId8"/>
+    <p:sldId id="273" r:id="rId9"/>
+    <p:sldId id="274" r:id="rId10"/>
+    <p:sldId id="275" r:id="rId11"/>
+    <p:sldId id="276" r:id="rId12"/>
+    <p:sldId id="277" r:id="rId13"/>
+    <p:sldId id="269" r:id="rId14"/>
+    <p:sldId id="270" r:id="rId15"/>
+    <p:sldId id="278" r:id="rId16"/>
+    <p:sldId id="279" r:id="rId17"/>
+    <p:sldId id="263" r:id="rId18"/>
+    <p:sldId id="271" r:id="rId19"/>
+    <p:sldId id="297" r:id="rId20"/>
+    <p:sldId id="266" r:id="rId21"/>
+    <p:sldId id="267" r:id="rId22"/>
   </p:sldIdLst>
   <p:sldSz cx="12192000" cy="6858000"/>
   <p:notesSz cx="6858000" cy="9144000"/>
@@ -238,7 +220,7 @@
           <a:p>
             <a:fld id="{F958DB6F-D407-4DAD-8E07-F71A85896F6E}" type="datetimeFigureOut">
               <a:rPr lang="nl-NL" smtClean="0"/>
-              <a:t>18-2-2026</a:t>
+              <a:t>7-3-2026</a:t>
             </a:fld>
             <a:endParaRPr lang="nl-NL"/>
           </a:p>
@@ -592,149 +574,6 @@
 </p:notes>
 </file>
 
-<file path=ppt/notesSlides/notesSlide2.xml><?xml version="1.0" encoding="utf-8"?>
-<p:notes xmlns:a="http://schemas.openxmlformats.org/drawingml/2006/main" xmlns:r="http://schemas.openxmlformats.org/officeDocument/2006/relationships" xmlns:p="http://schemas.openxmlformats.org/presentationml/2006/main">
-  <p:cSld>
-    <p:spTree>
-      <p:nvGrpSpPr>
-        <p:cNvPr id="1" name=""/>
-        <p:cNvGrpSpPr/>
-        <p:nvPr/>
-      </p:nvGrpSpPr>
-      <p:grpSpPr>
-        <a:xfrm>
-          <a:off x="0" y="0"/>
-          <a:ext cx="0" cy="0"/>
-          <a:chOff x="0" y="0"/>
-          <a:chExt cx="0" cy="0"/>
-        </a:xfrm>
-      </p:grpSpPr>
-      <p:sp>
-        <p:nvSpPr>
-          <p:cNvPr id="2" name="Tijdelijke aanduiding voor dia-afbeelding 1"/>
-          <p:cNvSpPr>
-            <a:spLocks noGrp="1" noRot="1" noChangeAspect="1"/>
-          </p:cNvSpPr>
-          <p:nvPr>
-            <p:ph type="sldImg"/>
-          </p:nvPr>
-        </p:nvSpPr>
-        <p:spPr/>
-      </p:sp>
-      <p:sp>
-        <p:nvSpPr>
-          <p:cNvPr id="3" name="Tijdelijke aanduiding voor notities 2"/>
-          <p:cNvSpPr>
-            <a:spLocks noGrp="1"/>
-          </p:cNvSpPr>
-          <p:nvPr>
-            <p:ph type="body" idx="1"/>
-          </p:nvPr>
-        </p:nvSpPr>
-        <p:spPr/>
-        <p:txBody>
-          <a:bodyPr/>
-          <a:lstStyle/>
-          <a:p>
-            <a:endParaRPr lang="nl-NL" dirty="0"/>
-          </a:p>
-          <a:p>
-            <a:endParaRPr lang="nl-NL" dirty="0"/>
-          </a:p>
-          <a:p>
-            <a:endParaRPr lang="nl-NL" dirty="0"/>
-          </a:p>
-          <a:p>
-            <a:r>
-              <a:rPr lang="nl-NL" dirty="0"/>
-              <a:t>Docent instructies:</a:t>
-            </a:r>
-          </a:p>
-          <a:p>
-            <a:r>
-              <a:rPr lang="nl-NL" dirty="0" err="1"/>
-              <a:t>Maka</a:t>
-            </a:r>
-            <a:r>
-              <a:rPr lang="nl-NL" dirty="0"/>
-              <a:t> kaartjes en geef deze uit</a:t>
-            </a:r>
-          </a:p>
-          <a:p>
-            <a:r>
-              <a:rPr lang="nl-NL" dirty="0"/>
-              <a:t>Er zijn alleen maar hacker en </a:t>
-            </a:r>
-            <a:r>
-              <a:rPr lang="nl-NL" dirty="0" err="1"/>
-              <a:t>developer</a:t>
-            </a:r>
-            <a:r>
-              <a:rPr lang="nl-NL" dirty="0"/>
-              <a:t> kaartjes</a:t>
-            </a:r>
-          </a:p>
-          <a:p>
-            <a:r>
-              <a:rPr lang="nl-NL" dirty="0"/>
-              <a:t>Het punt is dat een hacker en klant vaak niet goed te onderscheiden zijn als ze op het punt komen van toegang verlenen tot een database. </a:t>
-            </a:r>
-          </a:p>
-          <a:p>
-            <a:r>
-              <a:rPr lang="nl-NL" dirty="0"/>
-              <a:t>Daarom hebben we </a:t>
-            </a:r>
-            <a:r>
-              <a:rPr lang="nl-NL" dirty="0" err="1"/>
-              <a:t>beveiligings</a:t>
-            </a:r>
-            <a:r>
-              <a:rPr lang="nl-NL" dirty="0"/>
-              <a:t> maatregels, zoals verleen geen toegang tot de (gehele) database aan je klanten.</a:t>
-            </a:r>
-          </a:p>
-          <a:p>
-            <a:endParaRPr lang="nl-NL" dirty="0"/>
-          </a:p>
-        </p:txBody>
-      </p:sp>
-      <p:sp>
-        <p:nvSpPr>
-          <p:cNvPr id="4" name="Tijdelijke aanduiding voor dianummer 3"/>
-          <p:cNvSpPr>
-            <a:spLocks noGrp="1"/>
-          </p:cNvSpPr>
-          <p:nvPr>
-            <p:ph type="sldNum" sz="quarter" idx="5"/>
-          </p:nvPr>
-        </p:nvSpPr>
-        <p:spPr/>
-        <p:txBody>
-          <a:bodyPr/>
-          <a:lstStyle/>
-          <a:p>
-            <a:fld id="{815FC6EB-00F9-4F26-856D-FED6C6A7B264}" type="slidenum">
-              <a:rPr lang="nl-NL" smtClean="0"/>
-              <a:t>9</a:t>
-            </a:fld>
-            <a:endParaRPr lang="nl-NL"/>
-          </a:p>
-        </p:txBody>
-      </p:sp>
-    </p:spTree>
-    <p:extLst>
-      <p:ext uri="{BB962C8B-B14F-4D97-AF65-F5344CB8AC3E}">
-        <p14:creationId xmlns:p14="http://schemas.microsoft.com/office/powerpoint/2010/main" val="4072323057"/>
-      </p:ext>
-    </p:extLst>
-  </p:cSld>
-  <p:clrMapOvr>
-    <a:masterClrMapping/>
-  </p:clrMapOvr>
-</p:notes>
-</file>
-
 <file path=ppt/slideLayouts/slideLayout1.xml><?xml version="1.0" encoding="utf-8"?>
 <p:sldLayout xmlns:a="http://schemas.openxmlformats.org/drawingml/2006/main" xmlns:r="http://schemas.openxmlformats.org/officeDocument/2006/relationships" xmlns:p="http://schemas.openxmlformats.org/presentationml/2006/main" type="title" preserve="1">
   <p:cSld name="Titeldia">
@@ -887,7 +726,7 @@
           <a:p>
             <a:fld id="{6D18414D-5A9A-49A8-AA48-E9E7CADEA260}" type="datetimeFigureOut">
               <a:rPr lang="nl-NL" smtClean="0"/>
-              <a:t>18-2-2026</a:t>
+              <a:t>7-3-2026</a:t>
             </a:fld>
             <a:endParaRPr lang="nl-NL"/>
           </a:p>
@@ -1095,7 +934,7 @@
           <a:p>
             <a:fld id="{6D18414D-5A9A-49A8-AA48-E9E7CADEA260}" type="datetimeFigureOut">
               <a:rPr lang="nl-NL" smtClean="0"/>
-              <a:t>18-2-2026</a:t>
+              <a:t>7-3-2026</a:t>
             </a:fld>
             <a:endParaRPr lang="nl-NL"/>
           </a:p>
@@ -1304,7 +1143,7 @@
           <a:p>
             <a:fld id="{6D18414D-5A9A-49A8-AA48-E9E7CADEA260}" type="datetimeFigureOut">
               <a:rPr lang="nl-NL" smtClean="0"/>
-              <a:t>18-2-2026</a:t>
+              <a:t>7-3-2026</a:t>
             </a:fld>
             <a:endParaRPr lang="nl-NL"/>
           </a:p>
@@ -1502,7 +1341,7 @@
           <a:p>
             <a:fld id="{6D18414D-5A9A-49A8-AA48-E9E7CADEA260}" type="datetimeFigureOut">
               <a:rPr lang="nl-NL" smtClean="0"/>
-              <a:t>18-2-2026</a:t>
+              <a:t>7-3-2026</a:t>
             </a:fld>
             <a:endParaRPr lang="nl-NL"/>
           </a:p>
@@ -1777,7 +1616,7 @@
           <a:p>
             <a:fld id="{6D18414D-5A9A-49A8-AA48-E9E7CADEA260}" type="datetimeFigureOut">
               <a:rPr lang="nl-NL" smtClean="0"/>
-              <a:t>18-2-2026</a:t>
+              <a:t>7-3-2026</a:t>
             </a:fld>
             <a:endParaRPr lang="nl-NL"/>
           </a:p>
@@ -2042,7 +1881,7 @@
           <a:p>
             <a:fld id="{6D18414D-5A9A-49A8-AA48-E9E7CADEA260}" type="datetimeFigureOut">
               <a:rPr lang="nl-NL" smtClean="0"/>
-              <a:t>18-2-2026</a:t>
+              <a:t>7-3-2026</a:t>
             </a:fld>
             <a:endParaRPr lang="nl-NL"/>
           </a:p>
@@ -2455,7 +2294,7 @@
           <a:p>
             <a:fld id="{6D18414D-5A9A-49A8-AA48-E9E7CADEA260}" type="datetimeFigureOut">
               <a:rPr lang="nl-NL" smtClean="0"/>
-              <a:t>18-2-2026</a:t>
+              <a:t>7-3-2026</a:t>
             </a:fld>
             <a:endParaRPr lang="nl-NL"/>
           </a:p>
@@ -2596,7 +2435,7 @@
           <a:p>
             <a:fld id="{6D18414D-5A9A-49A8-AA48-E9E7CADEA260}" type="datetimeFigureOut">
               <a:rPr lang="nl-NL" smtClean="0"/>
-              <a:t>18-2-2026</a:t>
+              <a:t>7-3-2026</a:t>
             </a:fld>
             <a:endParaRPr lang="nl-NL"/>
           </a:p>
@@ -2709,7 +2548,7 @@
           <a:p>
             <a:fld id="{6D18414D-5A9A-49A8-AA48-E9E7CADEA260}" type="datetimeFigureOut">
               <a:rPr lang="nl-NL" smtClean="0"/>
-              <a:t>18-2-2026</a:t>
+              <a:t>7-3-2026</a:t>
             </a:fld>
             <a:endParaRPr lang="nl-NL"/>
           </a:p>
@@ -3020,7 +2859,7 @@
           <a:p>
             <a:fld id="{6D18414D-5A9A-49A8-AA48-E9E7CADEA260}" type="datetimeFigureOut">
               <a:rPr lang="nl-NL" smtClean="0"/>
-              <a:t>18-2-2026</a:t>
+              <a:t>7-3-2026</a:t>
             </a:fld>
             <a:endParaRPr lang="nl-NL"/>
           </a:p>
@@ -3311,7 +3150,7 @@
           <a:p>
             <a:fld id="{6D18414D-5A9A-49A8-AA48-E9E7CADEA260}" type="datetimeFigureOut">
               <a:rPr lang="nl-NL" smtClean="0"/>
-              <a:t>18-2-2026</a:t>
+              <a:t>7-3-2026</a:t>
             </a:fld>
             <a:endParaRPr lang="nl-NL"/>
           </a:p>
@@ -3503,7 +3342,7 @@
           <a:p>
             <a:fld id="{6D18414D-5A9A-49A8-AA48-E9E7CADEA260}" type="datetimeFigureOut">
               <a:rPr lang="nl-NL" smtClean="0"/>
-              <a:t>18-2-2026</a:t>
+              <a:t>7-3-2026</a:t>
             </a:fld>
             <a:endParaRPr lang="nl-NL" dirty="0"/>
           </a:p>
@@ -4407,984 +4246,6 @@
   <p:cSld>
     <p:spTree>
       <p:nvGrpSpPr>
-        <p:cNvPr id="1" name="">
-          <a:extLst>
-            <a:ext uri="{FF2B5EF4-FFF2-40B4-BE49-F238E27FC236}">
-              <a16:creationId xmlns:a16="http://schemas.microsoft.com/office/drawing/2014/main" id="{C9B2117A-879E-A59E-0366-D22BE8493F29}"/>
-            </a:ext>
-          </a:extLst>
-        </p:cNvPr>
-        <p:cNvGrpSpPr/>
-        <p:nvPr/>
-      </p:nvGrpSpPr>
-      <p:grpSpPr>
-        <a:xfrm>
-          <a:off x="0" y="0"/>
-          <a:ext cx="0" cy="0"/>
-          <a:chOff x="0" y="0"/>
-          <a:chExt cx="0" cy="0"/>
-        </a:xfrm>
-      </p:grpSpPr>
-      <p:sp>
-        <p:nvSpPr>
-          <p:cNvPr id="6" name="Titel 5">
-            <a:extLst>
-              <a:ext uri="{FF2B5EF4-FFF2-40B4-BE49-F238E27FC236}">
-                <a16:creationId xmlns:a16="http://schemas.microsoft.com/office/drawing/2014/main" id="{1010C8BD-A001-56F9-77AB-86E23608340B}"/>
-              </a:ext>
-            </a:extLst>
-          </p:cNvPr>
-          <p:cNvSpPr>
-            <a:spLocks noGrp="1"/>
-          </p:cNvSpPr>
-          <p:nvPr>
-            <p:ph type="ctrTitle"/>
-          </p:nvPr>
-        </p:nvSpPr>
-        <p:spPr/>
-        <p:txBody>
-          <a:bodyPr/>
-          <a:lstStyle/>
-          <a:p>
-            <a:r>
-              <a:rPr lang="nl-NL" dirty="0"/>
-              <a:t>Graag even inloggen</a:t>
-            </a:r>
-          </a:p>
-        </p:txBody>
-      </p:sp>
-      <p:sp>
-        <p:nvSpPr>
-          <p:cNvPr id="7" name="Ondertitel 6">
-            <a:extLst>
-              <a:ext uri="{FF2B5EF4-FFF2-40B4-BE49-F238E27FC236}">
-                <a16:creationId xmlns:a16="http://schemas.microsoft.com/office/drawing/2014/main" id="{C57C2A60-4A0A-1473-EE05-6E0AF4997F92}"/>
-              </a:ext>
-            </a:extLst>
-          </p:cNvPr>
-          <p:cNvSpPr>
-            <a:spLocks noGrp="1"/>
-          </p:cNvSpPr>
-          <p:nvPr>
-            <p:ph type="subTitle" idx="1"/>
-          </p:nvPr>
-        </p:nvSpPr>
-        <p:spPr/>
-        <p:txBody>
-          <a:bodyPr/>
-          <a:lstStyle/>
-          <a:p>
-            <a:endParaRPr lang="nl-NL"/>
-          </a:p>
-        </p:txBody>
-      </p:sp>
-      <p:pic>
-        <p:nvPicPr>
-          <p:cNvPr id="2" name="Graphic 1" descr="Vergrendelen met effen opvulling">
-            <a:extLst>
-              <a:ext uri="{FF2B5EF4-FFF2-40B4-BE49-F238E27FC236}">
-                <a16:creationId xmlns:a16="http://schemas.microsoft.com/office/drawing/2014/main" id="{6AD9B3EF-B7AA-4E40-9A8A-B542E2108543}"/>
-              </a:ext>
-            </a:extLst>
-          </p:cNvPr>
-          <p:cNvPicPr>
-            <a:picLocks noChangeAspect="1"/>
-          </p:cNvPicPr>
-          <p:nvPr/>
-        </p:nvPicPr>
-        <p:blipFill>
-          <a:blip r:embed="rId2">
-            <a:extLst>
-              <a:ext uri="{96DAC541-7B7A-43D3-8B79-37D633B846F1}">
-                <asvg:svgBlip xmlns:asvg="http://schemas.microsoft.com/office/drawing/2016/SVG/main" r:embed="rId3"/>
-              </a:ext>
-            </a:extLst>
-          </a:blip>
-          <a:stretch>
-            <a:fillRect/>
-          </a:stretch>
-        </p:blipFill>
-        <p:spPr>
-          <a:xfrm>
-            <a:off x="8194622" y="2630191"/>
-            <a:ext cx="2808157" cy="2808157"/>
-          </a:xfrm>
-          <a:prstGeom prst="rect">
-            <a:avLst/>
-          </a:prstGeom>
-        </p:spPr>
-      </p:pic>
-    </p:spTree>
-    <p:extLst>
-      <p:ext uri="{BB962C8B-B14F-4D97-AF65-F5344CB8AC3E}">
-        <p14:creationId xmlns:p14="http://schemas.microsoft.com/office/powerpoint/2010/main" val="3941779973"/>
-      </p:ext>
-    </p:extLst>
-  </p:cSld>
-  <p:clrMapOvr>
-    <a:masterClrMapping/>
-  </p:clrMapOvr>
-</p:sld>
-</file>
-
-<file path=ppt/slides/slide11.xml><?xml version="1.0" encoding="utf-8"?>
-<p:sld xmlns:a="http://schemas.openxmlformats.org/drawingml/2006/main" xmlns:r="http://schemas.openxmlformats.org/officeDocument/2006/relationships" xmlns:p="http://schemas.openxmlformats.org/presentationml/2006/main">
-  <p:cSld>
-    <p:spTree>
-      <p:nvGrpSpPr>
-        <p:cNvPr id="1" name=""/>
-        <p:cNvGrpSpPr/>
-        <p:nvPr/>
-      </p:nvGrpSpPr>
-      <p:grpSpPr>
-        <a:xfrm>
-          <a:off x="0" y="0"/>
-          <a:ext cx="0" cy="0"/>
-          <a:chOff x="0" y="0"/>
-          <a:chExt cx="0" cy="0"/>
-        </a:xfrm>
-      </p:grpSpPr>
-      <p:sp>
-        <p:nvSpPr>
-          <p:cNvPr id="2" name="Titel 1">
-            <a:extLst>
-              <a:ext uri="{FF2B5EF4-FFF2-40B4-BE49-F238E27FC236}">
-                <a16:creationId xmlns:a16="http://schemas.microsoft.com/office/drawing/2014/main" id="{F1607051-0F3C-18D1-A04F-F432EA764878}"/>
-              </a:ext>
-            </a:extLst>
-          </p:cNvPr>
-          <p:cNvSpPr>
-            <a:spLocks noGrp="1"/>
-          </p:cNvSpPr>
-          <p:nvPr>
-            <p:ph type="title"/>
-          </p:nvPr>
-        </p:nvSpPr>
-        <p:spPr/>
-        <p:txBody>
-          <a:bodyPr/>
-          <a:lstStyle/>
-          <a:p>
-            <a:r>
-              <a:rPr lang="nl-NL" dirty="0"/>
-              <a:t>Database security opties</a:t>
-            </a:r>
-          </a:p>
-        </p:txBody>
-      </p:sp>
-      <p:sp>
-        <p:nvSpPr>
-          <p:cNvPr id="3" name="Tijdelijke aanduiding voor inhoud 2">
-            <a:extLst>
-              <a:ext uri="{FF2B5EF4-FFF2-40B4-BE49-F238E27FC236}">
-                <a16:creationId xmlns:a16="http://schemas.microsoft.com/office/drawing/2014/main" id="{E65DC7E6-20F3-149A-4BB4-6A7FD62524AE}"/>
-              </a:ext>
-            </a:extLst>
-          </p:cNvPr>
-          <p:cNvSpPr>
-            <a:spLocks noGrp="1"/>
-          </p:cNvSpPr>
-          <p:nvPr>
-            <p:ph idx="1"/>
-          </p:nvPr>
-        </p:nvSpPr>
-        <p:spPr/>
-        <p:txBody>
-          <a:bodyPr/>
-          <a:lstStyle/>
-          <a:p>
-            <a:r>
-              <a:rPr lang="nl-NL" dirty="0"/>
-              <a:t>Wachtwoord beveiliging</a:t>
-            </a:r>
-          </a:p>
-          <a:p>
-            <a:r>
-              <a:rPr lang="nl-NL" dirty="0"/>
-              <a:t>Toegang tot specifieke datasets</a:t>
-            </a:r>
-          </a:p>
-          <a:p>
-            <a:r>
-              <a:rPr lang="nl-NL" dirty="0"/>
-              <a:t>Rollen en rechten</a:t>
-            </a:r>
-          </a:p>
-          <a:p>
-            <a:r>
-              <a:rPr lang="nl-NL" dirty="0"/>
-              <a:t>CRUD beveiliging</a:t>
-            </a:r>
-          </a:p>
-          <a:p>
-            <a:r>
-              <a:rPr lang="nl-NL" dirty="0"/>
-              <a:t>Download blokkades</a:t>
-            </a:r>
-          </a:p>
-          <a:p>
-            <a:r>
-              <a:rPr lang="nl-NL" dirty="0"/>
-              <a:t>Monitoring</a:t>
-            </a:r>
-          </a:p>
-        </p:txBody>
-      </p:sp>
-    </p:spTree>
-    <p:extLst>
-      <p:ext uri="{BB962C8B-B14F-4D97-AF65-F5344CB8AC3E}">
-        <p14:creationId xmlns:p14="http://schemas.microsoft.com/office/powerpoint/2010/main" val="4073276283"/>
-      </p:ext>
-    </p:extLst>
-  </p:cSld>
-  <p:clrMapOvr>
-    <a:masterClrMapping/>
-  </p:clrMapOvr>
-</p:sld>
-</file>
-
-<file path=ppt/slides/slide12.xml><?xml version="1.0" encoding="utf-8"?>
-<p:sld xmlns:a="http://schemas.openxmlformats.org/drawingml/2006/main" xmlns:r="http://schemas.openxmlformats.org/officeDocument/2006/relationships" xmlns:p="http://schemas.openxmlformats.org/presentationml/2006/main">
-  <p:cSld>
-    <p:spTree>
-      <p:nvGrpSpPr>
-        <p:cNvPr id="1" name="">
-          <a:extLst>
-            <a:ext uri="{FF2B5EF4-FFF2-40B4-BE49-F238E27FC236}">
-              <a16:creationId xmlns:a16="http://schemas.microsoft.com/office/drawing/2014/main" id="{4EB23515-7188-FA9A-E14D-3C35784CEC45}"/>
-            </a:ext>
-          </a:extLst>
-        </p:cNvPr>
-        <p:cNvGrpSpPr/>
-        <p:nvPr/>
-      </p:nvGrpSpPr>
-      <p:grpSpPr>
-        <a:xfrm>
-          <a:off x="0" y="0"/>
-          <a:ext cx="0" cy="0"/>
-          <a:chOff x="0" y="0"/>
-          <a:chExt cx="0" cy="0"/>
-        </a:xfrm>
-      </p:grpSpPr>
-      <p:sp>
-        <p:nvSpPr>
-          <p:cNvPr id="6" name="Titel 5">
-            <a:extLst>
-              <a:ext uri="{FF2B5EF4-FFF2-40B4-BE49-F238E27FC236}">
-                <a16:creationId xmlns:a16="http://schemas.microsoft.com/office/drawing/2014/main" id="{9AA4C5A6-0764-2F49-2417-B51850267752}"/>
-              </a:ext>
-            </a:extLst>
-          </p:cNvPr>
-          <p:cNvSpPr>
-            <a:spLocks noGrp="1"/>
-          </p:cNvSpPr>
-          <p:nvPr>
-            <p:ph type="ctrTitle"/>
-          </p:nvPr>
-        </p:nvSpPr>
-        <p:spPr/>
-        <p:txBody>
-          <a:bodyPr/>
-          <a:lstStyle/>
-          <a:p>
-            <a:r>
-              <a:rPr lang="nl-NL" dirty="0"/>
-              <a:t>Graag even inloggen</a:t>
-            </a:r>
-          </a:p>
-        </p:txBody>
-      </p:sp>
-      <p:sp>
-        <p:nvSpPr>
-          <p:cNvPr id="7" name="Ondertitel 6">
-            <a:extLst>
-              <a:ext uri="{FF2B5EF4-FFF2-40B4-BE49-F238E27FC236}">
-                <a16:creationId xmlns:a16="http://schemas.microsoft.com/office/drawing/2014/main" id="{CDF56AD3-F5FC-E890-B298-C212116BB3E9}"/>
-              </a:ext>
-            </a:extLst>
-          </p:cNvPr>
-          <p:cNvSpPr>
-            <a:spLocks noGrp="1"/>
-          </p:cNvSpPr>
-          <p:nvPr>
-            <p:ph type="subTitle" idx="1"/>
-          </p:nvPr>
-        </p:nvSpPr>
-        <p:spPr/>
-        <p:txBody>
-          <a:bodyPr/>
-          <a:lstStyle/>
-          <a:p>
-            <a:endParaRPr lang="nl-NL"/>
-          </a:p>
-        </p:txBody>
-      </p:sp>
-      <p:pic>
-        <p:nvPicPr>
-          <p:cNvPr id="2" name="Graphic 1" descr="Vergrendelen met effen opvulling">
-            <a:extLst>
-              <a:ext uri="{FF2B5EF4-FFF2-40B4-BE49-F238E27FC236}">
-                <a16:creationId xmlns:a16="http://schemas.microsoft.com/office/drawing/2014/main" id="{5D5C5F45-8446-6C76-F319-60DE7601BF0C}"/>
-              </a:ext>
-            </a:extLst>
-          </p:cNvPr>
-          <p:cNvPicPr>
-            <a:picLocks noChangeAspect="1"/>
-          </p:cNvPicPr>
-          <p:nvPr/>
-        </p:nvPicPr>
-        <p:blipFill>
-          <a:blip r:embed="rId2">
-            <a:extLst>
-              <a:ext uri="{96DAC541-7B7A-43D3-8B79-37D633B846F1}">
-                <asvg:svgBlip xmlns:asvg="http://schemas.microsoft.com/office/drawing/2016/SVG/main" r:embed="rId3"/>
-              </a:ext>
-            </a:extLst>
-          </a:blip>
-          <a:stretch>
-            <a:fillRect/>
-          </a:stretch>
-        </p:blipFill>
-        <p:spPr>
-          <a:xfrm>
-            <a:off x="8194622" y="2630191"/>
-            <a:ext cx="2808157" cy="2808157"/>
-          </a:xfrm>
-          <a:prstGeom prst="rect">
-            <a:avLst/>
-          </a:prstGeom>
-        </p:spPr>
-      </p:pic>
-    </p:spTree>
-    <p:extLst>
-      <p:ext uri="{BB962C8B-B14F-4D97-AF65-F5344CB8AC3E}">
-        <p14:creationId xmlns:p14="http://schemas.microsoft.com/office/powerpoint/2010/main" val="1578610089"/>
-      </p:ext>
-    </p:extLst>
-  </p:cSld>
-  <p:clrMapOvr>
-    <a:masterClrMapping/>
-  </p:clrMapOvr>
-</p:sld>
-</file>
-
-<file path=ppt/slides/slide13.xml><?xml version="1.0" encoding="utf-8"?>
-<p:sld xmlns:a="http://schemas.openxmlformats.org/drawingml/2006/main" xmlns:r="http://schemas.openxmlformats.org/officeDocument/2006/relationships" xmlns:p="http://schemas.openxmlformats.org/presentationml/2006/main">
-  <p:cSld>
-    <p:spTree>
-      <p:nvGrpSpPr>
-        <p:cNvPr id="1" name=""/>
-        <p:cNvGrpSpPr/>
-        <p:nvPr/>
-      </p:nvGrpSpPr>
-      <p:grpSpPr>
-        <a:xfrm>
-          <a:off x="0" y="0"/>
-          <a:ext cx="0" cy="0"/>
-          <a:chOff x="0" y="0"/>
-          <a:chExt cx="0" cy="0"/>
-        </a:xfrm>
-      </p:grpSpPr>
-      <p:sp>
-        <p:nvSpPr>
-          <p:cNvPr id="7" name="Titel 6">
-            <a:extLst>
-              <a:ext uri="{FF2B5EF4-FFF2-40B4-BE49-F238E27FC236}">
-                <a16:creationId xmlns:a16="http://schemas.microsoft.com/office/drawing/2014/main" id="{A2F2096A-9AE3-3EB4-2E7F-67C34ECFD46B}"/>
-              </a:ext>
-            </a:extLst>
-          </p:cNvPr>
-          <p:cNvSpPr>
-            <a:spLocks noGrp="1"/>
-          </p:cNvSpPr>
-          <p:nvPr>
-            <p:ph type="title"/>
-          </p:nvPr>
-        </p:nvSpPr>
-        <p:spPr/>
-        <p:txBody>
-          <a:bodyPr/>
-          <a:lstStyle/>
-          <a:p>
-            <a:r>
-              <a:rPr lang="nl-NL" dirty="0"/>
-              <a:t>Database security</a:t>
-            </a:r>
-          </a:p>
-        </p:txBody>
-      </p:sp>
-      <p:sp>
-        <p:nvSpPr>
-          <p:cNvPr id="8" name="Tijdelijke aanduiding voor tekst 7">
-            <a:extLst>
-              <a:ext uri="{FF2B5EF4-FFF2-40B4-BE49-F238E27FC236}">
-                <a16:creationId xmlns:a16="http://schemas.microsoft.com/office/drawing/2014/main" id="{E4C2A8AE-371B-86D5-9BC9-1E2BF184CB75}"/>
-              </a:ext>
-            </a:extLst>
-          </p:cNvPr>
-          <p:cNvSpPr>
-            <a:spLocks noGrp="1"/>
-          </p:cNvSpPr>
-          <p:nvPr>
-            <p:ph type="body" idx="1"/>
-          </p:nvPr>
-        </p:nvSpPr>
-        <p:spPr/>
-        <p:txBody>
-          <a:bodyPr/>
-          <a:lstStyle/>
-          <a:p>
-            <a:r>
-              <a:rPr lang="nl-NL" dirty="0"/>
-              <a:t>Wachtwoord beveiliging</a:t>
-            </a:r>
-          </a:p>
-        </p:txBody>
-      </p:sp>
-      <p:sp>
-        <p:nvSpPr>
-          <p:cNvPr id="9" name="Tijdelijke aanduiding voor inhoud 8">
-            <a:extLst>
-              <a:ext uri="{FF2B5EF4-FFF2-40B4-BE49-F238E27FC236}">
-                <a16:creationId xmlns:a16="http://schemas.microsoft.com/office/drawing/2014/main" id="{067380F8-675C-C67C-D2EA-B24700C5CDF8}"/>
-              </a:ext>
-            </a:extLst>
-          </p:cNvPr>
-          <p:cNvSpPr>
-            <a:spLocks noGrp="1"/>
-          </p:cNvSpPr>
-          <p:nvPr>
-            <p:ph sz="half" idx="2"/>
-          </p:nvPr>
-        </p:nvSpPr>
-        <p:spPr/>
-        <p:txBody>
-          <a:bodyPr/>
-          <a:lstStyle/>
-          <a:p>
-            <a:r>
-              <a:rPr lang="nl-NL" dirty="0"/>
-              <a:t>Het minste dat erin moet zitten is een wachtwoord dat niet “root” of “password” of 1234 is</a:t>
-            </a:r>
-          </a:p>
-          <a:p>
-            <a:r>
-              <a:rPr lang="nl-NL" dirty="0"/>
-              <a:t>Sterke wachtwoorden beschermen al een klein deel van je data.</a:t>
-            </a:r>
-          </a:p>
-        </p:txBody>
-      </p:sp>
-      <p:sp>
-        <p:nvSpPr>
-          <p:cNvPr id="10" name="Tijdelijke aanduiding voor tekst 9">
-            <a:extLst>
-              <a:ext uri="{FF2B5EF4-FFF2-40B4-BE49-F238E27FC236}">
-                <a16:creationId xmlns:a16="http://schemas.microsoft.com/office/drawing/2014/main" id="{3D54475E-7F45-2338-C98F-43D0CEC8E605}"/>
-              </a:ext>
-            </a:extLst>
-          </p:cNvPr>
-          <p:cNvSpPr>
-            <a:spLocks noGrp="1"/>
-          </p:cNvSpPr>
-          <p:nvPr>
-            <p:ph type="body" sz="quarter" idx="3"/>
-          </p:nvPr>
-        </p:nvSpPr>
-        <p:spPr/>
-        <p:txBody>
-          <a:bodyPr/>
-          <a:lstStyle/>
-          <a:p>
-            <a:r>
-              <a:rPr lang="nl-NL" dirty="0"/>
-              <a:t>Toegang tot specifieke datasets</a:t>
-            </a:r>
-          </a:p>
-        </p:txBody>
-      </p:sp>
-      <p:sp>
-        <p:nvSpPr>
-          <p:cNvPr id="11" name="Tijdelijke aanduiding voor inhoud 10">
-            <a:extLst>
-              <a:ext uri="{FF2B5EF4-FFF2-40B4-BE49-F238E27FC236}">
-                <a16:creationId xmlns:a16="http://schemas.microsoft.com/office/drawing/2014/main" id="{C0561236-1B2C-308C-EE15-44B6CA42E158}"/>
-              </a:ext>
-            </a:extLst>
-          </p:cNvPr>
-          <p:cNvSpPr>
-            <a:spLocks noGrp="1"/>
-          </p:cNvSpPr>
-          <p:nvPr>
-            <p:ph sz="quarter" idx="4"/>
-          </p:nvPr>
-        </p:nvSpPr>
-        <p:spPr/>
-        <p:txBody>
-          <a:bodyPr/>
-          <a:lstStyle/>
-          <a:p>
-            <a:r>
-              <a:rPr lang="nl-NL" dirty="0"/>
-              <a:t>Verleen alleen toegang tot data die absoluut nodig is. </a:t>
-            </a:r>
-          </a:p>
-          <a:p>
-            <a:r>
-              <a:rPr lang="nl-NL" dirty="0"/>
-              <a:t>Als de klanten de film namen nodig heeft, geef ze dan niet ook toegang tot klantrekeningnummers</a:t>
-            </a:r>
-          </a:p>
-          <a:p>
-            <a:r>
-              <a:rPr lang="nl-NL" dirty="0"/>
-              <a:t>Map uit wie wat nodig heeft.</a:t>
-            </a:r>
-          </a:p>
-        </p:txBody>
-      </p:sp>
-    </p:spTree>
-    <p:extLst>
-      <p:ext uri="{BB962C8B-B14F-4D97-AF65-F5344CB8AC3E}">
-        <p14:creationId xmlns:p14="http://schemas.microsoft.com/office/powerpoint/2010/main" val="3589108921"/>
-      </p:ext>
-    </p:extLst>
-  </p:cSld>
-  <p:clrMapOvr>
-    <a:masterClrMapping/>
-  </p:clrMapOvr>
-</p:sld>
-</file>
-
-<file path=ppt/slides/slide14.xml><?xml version="1.0" encoding="utf-8"?>
-<p:sld xmlns:a="http://schemas.openxmlformats.org/drawingml/2006/main" xmlns:r="http://schemas.openxmlformats.org/officeDocument/2006/relationships" xmlns:p="http://schemas.openxmlformats.org/presentationml/2006/main">
-  <p:cSld>
-    <p:spTree>
-      <p:nvGrpSpPr>
-        <p:cNvPr id="1" name="">
-          <a:extLst>
-            <a:ext uri="{FF2B5EF4-FFF2-40B4-BE49-F238E27FC236}">
-              <a16:creationId xmlns:a16="http://schemas.microsoft.com/office/drawing/2014/main" id="{37EF60A1-28DD-A327-0B54-5B093C5B347A}"/>
-            </a:ext>
-          </a:extLst>
-        </p:cNvPr>
-        <p:cNvGrpSpPr/>
-        <p:nvPr/>
-      </p:nvGrpSpPr>
-      <p:grpSpPr>
-        <a:xfrm>
-          <a:off x="0" y="0"/>
-          <a:ext cx="0" cy="0"/>
-          <a:chOff x="0" y="0"/>
-          <a:chExt cx="0" cy="0"/>
-        </a:xfrm>
-      </p:grpSpPr>
-      <p:sp>
-        <p:nvSpPr>
-          <p:cNvPr id="6" name="Titel 5">
-            <a:extLst>
-              <a:ext uri="{FF2B5EF4-FFF2-40B4-BE49-F238E27FC236}">
-                <a16:creationId xmlns:a16="http://schemas.microsoft.com/office/drawing/2014/main" id="{F093A856-2033-5006-3FD8-95444C01CF60}"/>
-              </a:ext>
-            </a:extLst>
-          </p:cNvPr>
-          <p:cNvSpPr>
-            <a:spLocks noGrp="1"/>
-          </p:cNvSpPr>
-          <p:nvPr>
-            <p:ph type="ctrTitle"/>
-          </p:nvPr>
-        </p:nvSpPr>
-        <p:spPr/>
-        <p:txBody>
-          <a:bodyPr/>
-          <a:lstStyle/>
-          <a:p>
-            <a:r>
-              <a:rPr lang="nl-NL" dirty="0"/>
-              <a:t>Graag even inloggen</a:t>
-            </a:r>
-          </a:p>
-        </p:txBody>
-      </p:sp>
-      <p:sp>
-        <p:nvSpPr>
-          <p:cNvPr id="7" name="Ondertitel 6">
-            <a:extLst>
-              <a:ext uri="{FF2B5EF4-FFF2-40B4-BE49-F238E27FC236}">
-                <a16:creationId xmlns:a16="http://schemas.microsoft.com/office/drawing/2014/main" id="{402A92B1-BA39-F7AF-6DFA-56C041AA7F17}"/>
-              </a:ext>
-            </a:extLst>
-          </p:cNvPr>
-          <p:cNvSpPr>
-            <a:spLocks noGrp="1"/>
-          </p:cNvSpPr>
-          <p:nvPr>
-            <p:ph type="subTitle" idx="1"/>
-          </p:nvPr>
-        </p:nvSpPr>
-        <p:spPr/>
-        <p:txBody>
-          <a:bodyPr/>
-          <a:lstStyle/>
-          <a:p>
-            <a:endParaRPr lang="nl-NL"/>
-          </a:p>
-        </p:txBody>
-      </p:sp>
-      <p:pic>
-        <p:nvPicPr>
-          <p:cNvPr id="2" name="Graphic 1" descr="Vergrendelen met effen opvulling">
-            <a:extLst>
-              <a:ext uri="{FF2B5EF4-FFF2-40B4-BE49-F238E27FC236}">
-                <a16:creationId xmlns:a16="http://schemas.microsoft.com/office/drawing/2014/main" id="{F6301C61-C5F7-3DE1-641B-74BD08B65A5C}"/>
-              </a:ext>
-            </a:extLst>
-          </p:cNvPr>
-          <p:cNvPicPr>
-            <a:picLocks noChangeAspect="1"/>
-          </p:cNvPicPr>
-          <p:nvPr/>
-        </p:nvPicPr>
-        <p:blipFill>
-          <a:blip r:embed="rId2">
-            <a:extLst>
-              <a:ext uri="{96DAC541-7B7A-43D3-8B79-37D633B846F1}">
-                <asvg:svgBlip xmlns:asvg="http://schemas.microsoft.com/office/drawing/2016/SVG/main" r:embed="rId3"/>
-              </a:ext>
-            </a:extLst>
-          </a:blip>
-          <a:stretch>
-            <a:fillRect/>
-          </a:stretch>
-        </p:blipFill>
-        <p:spPr>
-          <a:xfrm>
-            <a:off x="8194622" y="2630191"/>
-            <a:ext cx="2808157" cy="2808157"/>
-          </a:xfrm>
-          <a:prstGeom prst="rect">
-            <a:avLst/>
-          </a:prstGeom>
-        </p:spPr>
-      </p:pic>
-    </p:spTree>
-    <p:extLst>
-      <p:ext uri="{BB962C8B-B14F-4D97-AF65-F5344CB8AC3E}">
-        <p14:creationId xmlns:p14="http://schemas.microsoft.com/office/powerpoint/2010/main" val="3903306159"/>
-      </p:ext>
-    </p:extLst>
-  </p:cSld>
-  <p:clrMapOvr>
-    <a:masterClrMapping/>
-  </p:clrMapOvr>
-</p:sld>
-</file>
-
-<file path=ppt/slides/slide15.xml><?xml version="1.0" encoding="utf-8"?>
-<p:sld xmlns:a="http://schemas.openxmlformats.org/drawingml/2006/main" xmlns:r="http://schemas.openxmlformats.org/officeDocument/2006/relationships" xmlns:p="http://schemas.openxmlformats.org/presentationml/2006/main">
-  <p:cSld>
-    <p:spTree>
-      <p:nvGrpSpPr>
-        <p:cNvPr id="1" name=""/>
-        <p:cNvGrpSpPr/>
-        <p:nvPr/>
-      </p:nvGrpSpPr>
-      <p:grpSpPr>
-        <a:xfrm>
-          <a:off x="0" y="0"/>
-          <a:ext cx="0" cy="0"/>
-          <a:chOff x="0" y="0"/>
-          <a:chExt cx="0" cy="0"/>
-        </a:xfrm>
-      </p:grpSpPr>
-      <p:sp>
-        <p:nvSpPr>
-          <p:cNvPr id="2" name="Titel 1">
-            <a:extLst>
-              <a:ext uri="{FF2B5EF4-FFF2-40B4-BE49-F238E27FC236}">
-                <a16:creationId xmlns:a16="http://schemas.microsoft.com/office/drawing/2014/main" id="{89C1125D-4CA1-EF9B-21E6-BD429B9BC95F}"/>
-              </a:ext>
-            </a:extLst>
-          </p:cNvPr>
-          <p:cNvSpPr>
-            <a:spLocks noGrp="1"/>
-          </p:cNvSpPr>
-          <p:nvPr>
-            <p:ph type="title"/>
-          </p:nvPr>
-        </p:nvSpPr>
-        <p:spPr>
-          <a:xfrm>
-            <a:off x="838200" y="365125"/>
-            <a:ext cx="10515600" cy="1325563"/>
-          </a:xfrm>
-        </p:spPr>
-        <p:txBody>
-          <a:bodyPr anchor="ctr">
-            <a:normAutofit/>
-          </a:bodyPr>
-          <a:lstStyle/>
-          <a:p>
-            <a:r>
-              <a:rPr lang="nl-NL" dirty="0"/>
-              <a:t>Rollen en rechten</a:t>
-            </a:r>
-          </a:p>
-        </p:txBody>
-      </p:sp>
-      <p:pic>
-        <p:nvPicPr>
-          <p:cNvPr id="5" name="Graphic 4" descr="Werknemersbadge met effen opvulling">
-            <a:extLst>
-              <a:ext uri="{FF2B5EF4-FFF2-40B4-BE49-F238E27FC236}">
-                <a16:creationId xmlns:a16="http://schemas.microsoft.com/office/drawing/2014/main" id="{2AC91571-78AA-3F0F-EB3D-75329001C6C5}"/>
-              </a:ext>
-            </a:extLst>
-          </p:cNvPr>
-          <p:cNvPicPr>
-            <a:picLocks noChangeAspect="1"/>
-          </p:cNvPicPr>
-          <p:nvPr/>
-        </p:nvPicPr>
-        <p:blipFill>
-          <a:blip r:embed="rId2">
-            <a:extLst>
-              <a:ext uri="{96DAC541-7B7A-43D3-8B79-37D633B846F1}">
-                <asvg:svgBlip xmlns:asvg="http://schemas.microsoft.com/office/drawing/2016/SVG/main" r:embed="rId3"/>
-              </a:ext>
-            </a:extLst>
-          </a:blip>
-          <a:stretch>
-            <a:fillRect/>
-          </a:stretch>
-        </p:blipFill>
-        <p:spPr>
-          <a:xfrm>
-            <a:off x="1419708" y="1825625"/>
-            <a:ext cx="4018584" cy="4018584"/>
-          </a:xfrm>
-          <a:prstGeom prst="rect">
-            <a:avLst/>
-          </a:prstGeom>
-        </p:spPr>
-      </p:pic>
-      <p:sp>
-        <p:nvSpPr>
-          <p:cNvPr id="3" name="Tijdelijke aanduiding voor inhoud 2">
-            <a:extLst>
-              <a:ext uri="{FF2B5EF4-FFF2-40B4-BE49-F238E27FC236}">
-                <a16:creationId xmlns:a16="http://schemas.microsoft.com/office/drawing/2014/main" id="{11AFA5FA-0318-9C06-8412-B30BD730015B}"/>
-              </a:ext>
-            </a:extLst>
-          </p:cNvPr>
-          <p:cNvSpPr>
-            <a:spLocks noGrp="1"/>
-          </p:cNvSpPr>
-          <p:nvPr>
-            <p:ph sz="half" idx="2"/>
-          </p:nvPr>
-        </p:nvSpPr>
-        <p:spPr>
-          <a:xfrm>
-            <a:off x="6172200" y="1825625"/>
-            <a:ext cx="5181600" cy="4018584"/>
-          </a:xfrm>
-        </p:spPr>
-        <p:txBody>
-          <a:bodyPr>
-            <a:normAutofit/>
-          </a:bodyPr>
-          <a:lstStyle/>
-          <a:p>
-            <a:r>
-              <a:rPr lang="nl-NL" sz="2200" dirty="0"/>
-              <a:t>Je kan rollen/</a:t>
-            </a:r>
-            <a:r>
-              <a:rPr lang="nl-NL" sz="2200" dirty="0" err="1"/>
-              <a:t>Gebruikerprofielen</a:t>
-            </a:r>
-            <a:r>
-              <a:rPr lang="nl-NL" sz="2200" dirty="0"/>
-              <a:t> maken voor een database.</a:t>
-            </a:r>
-          </a:p>
-          <a:p>
-            <a:r>
-              <a:rPr lang="nl-NL" sz="2200" dirty="0"/>
-              <a:t>Deze rollen bevatten bepaalde rechten zoals:</a:t>
-            </a:r>
-          </a:p>
-          <a:p>
-            <a:pPr lvl="1"/>
-            <a:r>
-              <a:rPr lang="nl-NL" sz="2200" dirty="0"/>
-              <a:t>Of dit type gebruiker mag toevoegen, verwijderen of wijzigen.</a:t>
-            </a:r>
-          </a:p>
-          <a:p>
-            <a:pPr lvl="1"/>
-            <a:r>
-              <a:rPr lang="nl-NL" sz="2200" dirty="0"/>
-              <a:t>Welke tabellen dit type gebruiker mag inzien.</a:t>
-            </a:r>
-          </a:p>
-          <a:p>
-            <a:pPr lvl="1"/>
-            <a:r>
-              <a:rPr lang="nl-NL" sz="2200" dirty="0"/>
-              <a:t>Of de gebruiker op grote schaal aanpassingen mag maken.</a:t>
-            </a:r>
-          </a:p>
-          <a:p>
-            <a:endParaRPr lang="nl-NL" sz="2200" dirty="0"/>
-          </a:p>
-        </p:txBody>
-      </p:sp>
-    </p:spTree>
-    <p:extLst>
-      <p:ext uri="{BB962C8B-B14F-4D97-AF65-F5344CB8AC3E}">
-        <p14:creationId xmlns:p14="http://schemas.microsoft.com/office/powerpoint/2010/main" val="3937316746"/>
-      </p:ext>
-    </p:extLst>
-  </p:cSld>
-  <p:clrMapOvr>
-    <a:masterClrMapping/>
-  </p:clrMapOvr>
-</p:sld>
-</file>
-
-<file path=ppt/slides/slide16.xml><?xml version="1.0" encoding="utf-8"?>
-<p:sld xmlns:a="http://schemas.openxmlformats.org/drawingml/2006/main" xmlns:r="http://schemas.openxmlformats.org/officeDocument/2006/relationships" xmlns:p="http://schemas.openxmlformats.org/presentationml/2006/main">
-  <p:cSld>
-    <p:spTree>
-      <p:nvGrpSpPr>
-        <p:cNvPr id="1" name="">
-          <a:extLst>
-            <a:ext uri="{FF2B5EF4-FFF2-40B4-BE49-F238E27FC236}">
-              <a16:creationId xmlns:a16="http://schemas.microsoft.com/office/drawing/2014/main" id="{AE52613B-B5D6-464C-AEC5-9AF812CF4D50}"/>
-            </a:ext>
-          </a:extLst>
-        </p:cNvPr>
-        <p:cNvGrpSpPr/>
-        <p:nvPr/>
-      </p:nvGrpSpPr>
-      <p:grpSpPr>
-        <a:xfrm>
-          <a:off x="0" y="0"/>
-          <a:ext cx="0" cy="0"/>
-          <a:chOff x="0" y="0"/>
-          <a:chExt cx="0" cy="0"/>
-        </a:xfrm>
-      </p:grpSpPr>
-      <p:sp>
-        <p:nvSpPr>
-          <p:cNvPr id="6" name="Titel 5">
-            <a:extLst>
-              <a:ext uri="{FF2B5EF4-FFF2-40B4-BE49-F238E27FC236}">
-                <a16:creationId xmlns:a16="http://schemas.microsoft.com/office/drawing/2014/main" id="{E88E8761-86DB-29EB-974F-FE252BC7B844}"/>
-              </a:ext>
-            </a:extLst>
-          </p:cNvPr>
-          <p:cNvSpPr>
-            <a:spLocks noGrp="1"/>
-          </p:cNvSpPr>
-          <p:nvPr>
-            <p:ph type="ctrTitle"/>
-          </p:nvPr>
-        </p:nvSpPr>
-        <p:spPr/>
-        <p:txBody>
-          <a:bodyPr/>
-          <a:lstStyle/>
-          <a:p>
-            <a:r>
-              <a:rPr lang="nl-NL" dirty="0"/>
-              <a:t>Graag even inloggen</a:t>
-            </a:r>
-          </a:p>
-        </p:txBody>
-      </p:sp>
-      <p:sp>
-        <p:nvSpPr>
-          <p:cNvPr id="7" name="Ondertitel 6">
-            <a:extLst>
-              <a:ext uri="{FF2B5EF4-FFF2-40B4-BE49-F238E27FC236}">
-                <a16:creationId xmlns:a16="http://schemas.microsoft.com/office/drawing/2014/main" id="{9BFC3FF6-4ACA-8E13-F9F9-23EF479D207B}"/>
-              </a:ext>
-            </a:extLst>
-          </p:cNvPr>
-          <p:cNvSpPr>
-            <a:spLocks noGrp="1"/>
-          </p:cNvSpPr>
-          <p:nvPr>
-            <p:ph type="subTitle" idx="1"/>
-          </p:nvPr>
-        </p:nvSpPr>
-        <p:spPr/>
-        <p:txBody>
-          <a:bodyPr/>
-          <a:lstStyle/>
-          <a:p>
-            <a:endParaRPr lang="nl-NL"/>
-          </a:p>
-        </p:txBody>
-      </p:sp>
-      <p:pic>
-        <p:nvPicPr>
-          <p:cNvPr id="2" name="Graphic 1" descr="Vergrendelen met effen opvulling">
-            <a:extLst>
-              <a:ext uri="{FF2B5EF4-FFF2-40B4-BE49-F238E27FC236}">
-                <a16:creationId xmlns:a16="http://schemas.microsoft.com/office/drawing/2014/main" id="{73B99E90-912E-85BE-2D5B-8909DA951098}"/>
-              </a:ext>
-            </a:extLst>
-          </p:cNvPr>
-          <p:cNvPicPr>
-            <a:picLocks noChangeAspect="1"/>
-          </p:cNvPicPr>
-          <p:nvPr/>
-        </p:nvPicPr>
-        <p:blipFill>
-          <a:blip r:embed="rId2">
-            <a:extLst>
-              <a:ext uri="{96DAC541-7B7A-43D3-8B79-37D633B846F1}">
-                <asvg:svgBlip xmlns:asvg="http://schemas.microsoft.com/office/drawing/2016/SVG/main" r:embed="rId3"/>
-              </a:ext>
-            </a:extLst>
-          </a:blip>
-          <a:stretch>
-            <a:fillRect/>
-          </a:stretch>
-        </p:blipFill>
-        <p:spPr>
-          <a:xfrm>
-            <a:off x="8194622" y="2630191"/>
-            <a:ext cx="2808157" cy="2808157"/>
-          </a:xfrm>
-          <a:prstGeom prst="rect">
-            <a:avLst/>
-          </a:prstGeom>
-        </p:spPr>
-      </p:pic>
-    </p:spTree>
-    <p:extLst>
-      <p:ext uri="{BB962C8B-B14F-4D97-AF65-F5344CB8AC3E}">
-        <p14:creationId xmlns:p14="http://schemas.microsoft.com/office/powerpoint/2010/main" val="1922875439"/>
-      </p:ext>
-    </p:extLst>
-  </p:cSld>
-  <p:clrMapOvr>
-    <a:masterClrMapping/>
-  </p:clrMapOvr>
-</p:sld>
-</file>
-
-<file path=ppt/slides/slide17.xml><?xml version="1.0" encoding="utf-8"?>
-<p:sld xmlns:a="http://schemas.openxmlformats.org/drawingml/2006/main" xmlns:r="http://schemas.openxmlformats.org/officeDocument/2006/relationships" xmlns:p="http://schemas.openxmlformats.org/presentationml/2006/main">
-  <p:cSld>
-    <p:spTree>
-      <p:nvGrpSpPr>
         <p:cNvPr id="1" name=""/>
         <p:cNvGrpSpPr/>
         <p:nvPr/>
@@ -5563,132 +4424,7 @@
 </p:sld>
 </file>
 
-<file path=ppt/slides/slide18.xml><?xml version="1.0" encoding="utf-8"?>
-<p:sld xmlns:a="http://schemas.openxmlformats.org/drawingml/2006/main" xmlns:r="http://schemas.openxmlformats.org/officeDocument/2006/relationships" xmlns:p="http://schemas.openxmlformats.org/presentationml/2006/main">
-  <p:cSld>
-    <p:spTree>
-      <p:nvGrpSpPr>
-        <p:cNvPr id="1" name="">
-          <a:extLst>
-            <a:ext uri="{FF2B5EF4-FFF2-40B4-BE49-F238E27FC236}">
-              <a16:creationId xmlns:a16="http://schemas.microsoft.com/office/drawing/2014/main" id="{DA4FC024-4904-C5B3-E1A2-04A4ECF6C1A0}"/>
-            </a:ext>
-          </a:extLst>
-        </p:cNvPr>
-        <p:cNvGrpSpPr/>
-        <p:nvPr/>
-      </p:nvGrpSpPr>
-      <p:grpSpPr>
-        <a:xfrm>
-          <a:off x="0" y="0"/>
-          <a:ext cx="0" cy="0"/>
-          <a:chOff x="0" y="0"/>
-          <a:chExt cx="0" cy="0"/>
-        </a:xfrm>
-      </p:grpSpPr>
-      <p:sp>
-        <p:nvSpPr>
-          <p:cNvPr id="6" name="Titel 5">
-            <a:extLst>
-              <a:ext uri="{FF2B5EF4-FFF2-40B4-BE49-F238E27FC236}">
-                <a16:creationId xmlns:a16="http://schemas.microsoft.com/office/drawing/2014/main" id="{9EEA5423-620A-14B2-5F06-C8415C8649D6}"/>
-              </a:ext>
-            </a:extLst>
-          </p:cNvPr>
-          <p:cNvSpPr>
-            <a:spLocks noGrp="1"/>
-          </p:cNvSpPr>
-          <p:nvPr>
-            <p:ph type="ctrTitle"/>
-          </p:nvPr>
-        </p:nvSpPr>
-        <p:spPr/>
-        <p:txBody>
-          <a:bodyPr/>
-          <a:lstStyle/>
-          <a:p>
-            <a:r>
-              <a:rPr lang="nl-NL" dirty="0"/>
-              <a:t>Graag even inloggen</a:t>
-            </a:r>
-          </a:p>
-        </p:txBody>
-      </p:sp>
-      <p:sp>
-        <p:nvSpPr>
-          <p:cNvPr id="7" name="Ondertitel 6">
-            <a:extLst>
-              <a:ext uri="{FF2B5EF4-FFF2-40B4-BE49-F238E27FC236}">
-                <a16:creationId xmlns:a16="http://schemas.microsoft.com/office/drawing/2014/main" id="{B10E2454-4E1F-F56D-DC25-172C08382036}"/>
-              </a:ext>
-            </a:extLst>
-          </p:cNvPr>
-          <p:cNvSpPr>
-            <a:spLocks noGrp="1"/>
-          </p:cNvSpPr>
-          <p:nvPr>
-            <p:ph type="subTitle" idx="1"/>
-          </p:nvPr>
-        </p:nvSpPr>
-        <p:spPr/>
-        <p:txBody>
-          <a:bodyPr/>
-          <a:lstStyle/>
-          <a:p>
-            <a:endParaRPr lang="nl-NL"/>
-          </a:p>
-        </p:txBody>
-      </p:sp>
-      <p:pic>
-        <p:nvPicPr>
-          <p:cNvPr id="2" name="Graphic 1" descr="Vergrendelen met effen opvulling">
-            <a:extLst>
-              <a:ext uri="{FF2B5EF4-FFF2-40B4-BE49-F238E27FC236}">
-                <a16:creationId xmlns:a16="http://schemas.microsoft.com/office/drawing/2014/main" id="{81950590-6F72-CE62-730E-8A8A582880DB}"/>
-              </a:ext>
-            </a:extLst>
-          </p:cNvPr>
-          <p:cNvPicPr>
-            <a:picLocks noChangeAspect="1"/>
-          </p:cNvPicPr>
-          <p:nvPr/>
-        </p:nvPicPr>
-        <p:blipFill>
-          <a:blip r:embed="rId2">
-            <a:extLst>
-              <a:ext uri="{96DAC541-7B7A-43D3-8B79-37D633B846F1}">
-                <asvg:svgBlip xmlns:asvg="http://schemas.microsoft.com/office/drawing/2016/SVG/main" r:embed="rId3"/>
-              </a:ext>
-            </a:extLst>
-          </a:blip>
-          <a:stretch>
-            <a:fillRect/>
-          </a:stretch>
-        </p:blipFill>
-        <p:spPr>
-          <a:xfrm>
-            <a:off x="8194622" y="2630191"/>
-            <a:ext cx="2808157" cy="2808157"/>
-          </a:xfrm>
-          <a:prstGeom prst="rect">
-            <a:avLst/>
-          </a:prstGeom>
-        </p:spPr>
-      </p:pic>
-    </p:spTree>
-    <p:extLst>
-      <p:ext uri="{BB962C8B-B14F-4D97-AF65-F5344CB8AC3E}">
-        <p14:creationId xmlns:p14="http://schemas.microsoft.com/office/powerpoint/2010/main" val="2420531085"/>
-      </p:ext>
-    </p:extLst>
-  </p:cSld>
-  <p:clrMapOvr>
-    <a:masterClrMapping/>
-  </p:clrMapOvr>
-</p:sld>
-</file>
-
-<file path=ppt/slides/slide19.xml><?xml version="1.0" encoding="utf-8"?>
+<file path=ppt/slides/slide11.xml><?xml version="1.0" encoding="utf-8"?>
 <p:sld xmlns:a="http://schemas.openxmlformats.org/drawingml/2006/main" xmlns:r="http://schemas.openxmlformats.org/officeDocument/2006/relationships" xmlns:p="http://schemas.openxmlformats.org/presentationml/2006/main">
   <p:cSld>
     <p:spTree>
@@ -5940,258 +4676,7 @@
 </p:sld>
 </file>
 
-<file path=ppt/slides/slide2.xml><?xml version="1.0" encoding="utf-8"?>
-<p:sld xmlns:a="http://schemas.openxmlformats.org/drawingml/2006/main" xmlns:r="http://schemas.openxmlformats.org/officeDocument/2006/relationships" xmlns:p="http://schemas.openxmlformats.org/presentationml/2006/main">
-  <p:cSld>
-    <p:spTree>
-      <p:nvGrpSpPr>
-        <p:cNvPr id="1" name=""/>
-        <p:cNvGrpSpPr/>
-        <p:nvPr/>
-      </p:nvGrpSpPr>
-      <p:grpSpPr>
-        <a:xfrm>
-          <a:off x="0" y="0"/>
-          <a:ext cx="0" cy="0"/>
-          <a:chOff x="0" y="0"/>
-          <a:chExt cx="0" cy="0"/>
-        </a:xfrm>
-      </p:grpSpPr>
-      <p:sp>
-        <p:nvSpPr>
-          <p:cNvPr id="2" name="Titel 1">
-            <a:extLst>
-              <a:ext uri="{FF2B5EF4-FFF2-40B4-BE49-F238E27FC236}">
-                <a16:creationId xmlns:a16="http://schemas.microsoft.com/office/drawing/2014/main" id="{BBC467E5-39E6-9E7F-1C58-661632973934}"/>
-              </a:ext>
-            </a:extLst>
-          </p:cNvPr>
-          <p:cNvSpPr>
-            <a:spLocks noGrp="1"/>
-          </p:cNvSpPr>
-          <p:nvPr>
-            <p:ph type="title"/>
-          </p:nvPr>
-        </p:nvSpPr>
-        <p:spPr/>
-        <p:txBody>
-          <a:bodyPr/>
-          <a:lstStyle/>
-          <a:p>
-            <a:r>
-              <a:rPr lang="nl-NL" dirty="0"/>
-              <a:t>Programma</a:t>
-            </a:r>
-          </a:p>
-        </p:txBody>
-      </p:sp>
-      <p:sp>
-        <p:nvSpPr>
-          <p:cNvPr id="3" name="Tijdelijke aanduiding voor inhoud 2">
-            <a:extLst>
-              <a:ext uri="{FF2B5EF4-FFF2-40B4-BE49-F238E27FC236}">
-                <a16:creationId xmlns:a16="http://schemas.microsoft.com/office/drawing/2014/main" id="{DE110306-4AAB-9607-E18E-ACBAC34BDE30}"/>
-              </a:ext>
-            </a:extLst>
-          </p:cNvPr>
-          <p:cNvSpPr>
-            <a:spLocks noGrp="1"/>
-          </p:cNvSpPr>
-          <p:nvPr>
-            <p:ph idx="1"/>
-          </p:nvPr>
-        </p:nvSpPr>
-        <p:spPr/>
-        <p:txBody>
-          <a:bodyPr/>
-          <a:lstStyle/>
-          <a:p>
-            <a:r>
-              <a:rPr lang="nl-NL" dirty="0"/>
-              <a:t>Terugblik vorige les</a:t>
-            </a:r>
-          </a:p>
-          <a:p>
-            <a:r>
-              <a:rPr lang="nl-NL" dirty="0"/>
-              <a:t>Leerdoelen</a:t>
-            </a:r>
-          </a:p>
-          <a:p>
-            <a:r>
-              <a:rPr lang="nl-NL" dirty="0"/>
-              <a:t>Database </a:t>
-            </a:r>
-            <a:r>
-              <a:rPr lang="nl-NL" dirty="0" err="1"/>
-              <a:t>secruity</a:t>
-            </a:r>
-            <a:endParaRPr lang="nl-NL" dirty="0"/>
-          </a:p>
-          <a:p>
-            <a:r>
-              <a:rPr lang="nl-NL" dirty="0"/>
-              <a:t>Database </a:t>
-            </a:r>
-            <a:r>
-              <a:rPr lang="nl-NL" dirty="0" err="1"/>
-              <a:t>injections</a:t>
-            </a:r>
-            <a:endParaRPr lang="nl-NL" dirty="0"/>
-          </a:p>
-          <a:p>
-            <a:r>
-              <a:rPr lang="nl-NL" dirty="0"/>
-              <a:t>JWT</a:t>
-            </a:r>
-          </a:p>
-          <a:p>
-            <a:r>
-              <a:rPr lang="nl-NL" dirty="0"/>
-              <a:t>Volgende week</a:t>
-            </a:r>
-          </a:p>
-        </p:txBody>
-      </p:sp>
-    </p:spTree>
-    <p:extLst>
-      <p:ext uri="{BB962C8B-B14F-4D97-AF65-F5344CB8AC3E}">
-        <p14:creationId xmlns:p14="http://schemas.microsoft.com/office/powerpoint/2010/main" val="3969768279"/>
-      </p:ext>
-    </p:extLst>
-  </p:cSld>
-  <p:clrMapOvr>
-    <a:masterClrMapping/>
-  </p:clrMapOvr>
-</p:sld>
-</file>
-
-<file path=ppt/slides/slide20.xml><?xml version="1.0" encoding="utf-8"?>
-<p:sld xmlns:a="http://schemas.openxmlformats.org/drawingml/2006/main" xmlns:r="http://schemas.openxmlformats.org/officeDocument/2006/relationships" xmlns:p="http://schemas.openxmlformats.org/presentationml/2006/main">
-  <p:cSld>
-    <p:spTree>
-      <p:nvGrpSpPr>
-        <p:cNvPr id="1" name="">
-          <a:extLst>
-            <a:ext uri="{FF2B5EF4-FFF2-40B4-BE49-F238E27FC236}">
-              <a16:creationId xmlns:a16="http://schemas.microsoft.com/office/drawing/2014/main" id="{76898A1B-0AED-CEAA-C349-F313D9F76CA4}"/>
-            </a:ext>
-          </a:extLst>
-        </p:cNvPr>
-        <p:cNvGrpSpPr/>
-        <p:nvPr/>
-      </p:nvGrpSpPr>
-      <p:grpSpPr>
-        <a:xfrm>
-          <a:off x="0" y="0"/>
-          <a:ext cx="0" cy="0"/>
-          <a:chOff x="0" y="0"/>
-          <a:chExt cx="0" cy="0"/>
-        </a:xfrm>
-      </p:grpSpPr>
-      <p:sp>
-        <p:nvSpPr>
-          <p:cNvPr id="6" name="Titel 5">
-            <a:extLst>
-              <a:ext uri="{FF2B5EF4-FFF2-40B4-BE49-F238E27FC236}">
-                <a16:creationId xmlns:a16="http://schemas.microsoft.com/office/drawing/2014/main" id="{35793462-AA0A-631D-CA4A-C3A3EE23DAA5}"/>
-              </a:ext>
-            </a:extLst>
-          </p:cNvPr>
-          <p:cNvSpPr>
-            <a:spLocks noGrp="1"/>
-          </p:cNvSpPr>
-          <p:nvPr>
-            <p:ph type="ctrTitle"/>
-          </p:nvPr>
-        </p:nvSpPr>
-        <p:spPr/>
-        <p:txBody>
-          <a:bodyPr/>
-          <a:lstStyle/>
-          <a:p>
-            <a:r>
-              <a:rPr lang="nl-NL" dirty="0"/>
-              <a:t>Graag even inloggen</a:t>
-            </a:r>
-          </a:p>
-        </p:txBody>
-      </p:sp>
-      <p:sp>
-        <p:nvSpPr>
-          <p:cNvPr id="7" name="Ondertitel 6">
-            <a:extLst>
-              <a:ext uri="{FF2B5EF4-FFF2-40B4-BE49-F238E27FC236}">
-                <a16:creationId xmlns:a16="http://schemas.microsoft.com/office/drawing/2014/main" id="{906FEE38-19CC-6FB8-8C26-0CE8E1184F45}"/>
-              </a:ext>
-            </a:extLst>
-          </p:cNvPr>
-          <p:cNvSpPr>
-            <a:spLocks noGrp="1"/>
-          </p:cNvSpPr>
-          <p:nvPr>
-            <p:ph type="subTitle" idx="1"/>
-          </p:nvPr>
-        </p:nvSpPr>
-        <p:spPr/>
-        <p:txBody>
-          <a:bodyPr/>
-          <a:lstStyle/>
-          <a:p>
-            <a:endParaRPr lang="nl-NL"/>
-          </a:p>
-        </p:txBody>
-      </p:sp>
-      <p:pic>
-        <p:nvPicPr>
-          <p:cNvPr id="2" name="Graphic 1" descr="Vergrendelen met effen opvulling">
-            <a:extLst>
-              <a:ext uri="{FF2B5EF4-FFF2-40B4-BE49-F238E27FC236}">
-                <a16:creationId xmlns:a16="http://schemas.microsoft.com/office/drawing/2014/main" id="{C696AAEF-0AA9-12E7-CE43-55F9D2B18E75}"/>
-              </a:ext>
-            </a:extLst>
-          </p:cNvPr>
-          <p:cNvPicPr>
-            <a:picLocks noChangeAspect="1"/>
-          </p:cNvPicPr>
-          <p:nvPr/>
-        </p:nvPicPr>
-        <p:blipFill>
-          <a:blip r:embed="rId2">
-            <a:extLst>
-              <a:ext uri="{96DAC541-7B7A-43D3-8B79-37D633B846F1}">
-                <asvg:svgBlip xmlns:asvg="http://schemas.microsoft.com/office/drawing/2016/SVG/main" r:embed="rId3"/>
-              </a:ext>
-            </a:extLst>
-          </a:blip>
-          <a:stretch>
-            <a:fillRect/>
-          </a:stretch>
-        </p:blipFill>
-        <p:spPr>
-          <a:xfrm>
-            <a:off x="8194622" y="2630191"/>
-            <a:ext cx="2808157" cy="2808157"/>
-          </a:xfrm>
-          <a:prstGeom prst="rect">
-            <a:avLst/>
-          </a:prstGeom>
-        </p:spPr>
-      </p:pic>
-    </p:spTree>
-    <p:extLst>
-      <p:ext uri="{BB962C8B-B14F-4D97-AF65-F5344CB8AC3E}">
-        <p14:creationId xmlns:p14="http://schemas.microsoft.com/office/powerpoint/2010/main" val="3096464737"/>
-      </p:ext>
-    </p:extLst>
-  </p:cSld>
-  <p:clrMapOvr>
-    <a:masterClrMapping/>
-  </p:clrMapOvr>
-</p:sld>
-</file>
-
-<file path=ppt/slides/slide21.xml><?xml version="1.0" encoding="utf-8"?>
+<file path=ppt/slides/slide12.xml><?xml version="1.0" encoding="utf-8"?>
 <p:sld xmlns:a="http://schemas.openxmlformats.org/drawingml/2006/main" xmlns:r="http://schemas.openxmlformats.org/officeDocument/2006/relationships" xmlns:p="http://schemas.openxmlformats.org/presentationml/2006/main">
   <p:cSld>
     <p:spTree>
@@ -6326,132 +4811,7 @@
 </p:sld>
 </file>
 
-<file path=ppt/slides/slide22.xml><?xml version="1.0" encoding="utf-8"?>
-<p:sld xmlns:a="http://schemas.openxmlformats.org/drawingml/2006/main" xmlns:r="http://schemas.openxmlformats.org/officeDocument/2006/relationships" xmlns:p="http://schemas.openxmlformats.org/presentationml/2006/main">
-  <p:cSld>
-    <p:spTree>
-      <p:nvGrpSpPr>
-        <p:cNvPr id="1" name="">
-          <a:extLst>
-            <a:ext uri="{FF2B5EF4-FFF2-40B4-BE49-F238E27FC236}">
-              <a16:creationId xmlns:a16="http://schemas.microsoft.com/office/drawing/2014/main" id="{8E4E3E70-9967-ADC1-DF1E-5D37A1D49947}"/>
-            </a:ext>
-          </a:extLst>
-        </p:cNvPr>
-        <p:cNvGrpSpPr/>
-        <p:nvPr/>
-      </p:nvGrpSpPr>
-      <p:grpSpPr>
-        <a:xfrm>
-          <a:off x="0" y="0"/>
-          <a:ext cx="0" cy="0"/>
-          <a:chOff x="0" y="0"/>
-          <a:chExt cx="0" cy="0"/>
-        </a:xfrm>
-      </p:grpSpPr>
-      <p:sp>
-        <p:nvSpPr>
-          <p:cNvPr id="6" name="Titel 5">
-            <a:extLst>
-              <a:ext uri="{FF2B5EF4-FFF2-40B4-BE49-F238E27FC236}">
-                <a16:creationId xmlns:a16="http://schemas.microsoft.com/office/drawing/2014/main" id="{405EA944-0823-7115-0B9C-D4B553D60303}"/>
-              </a:ext>
-            </a:extLst>
-          </p:cNvPr>
-          <p:cNvSpPr>
-            <a:spLocks noGrp="1"/>
-          </p:cNvSpPr>
-          <p:nvPr>
-            <p:ph type="ctrTitle"/>
-          </p:nvPr>
-        </p:nvSpPr>
-        <p:spPr/>
-        <p:txBody>
-          <a:bodyPr/>
-          <a:lstStyle/>
-          <a:p>
-            <a:r>
-              <a:rPr lang="nl-NL" dirty="0"/>
-              <a:t>Graag even inloggen</a:t>
-            </a:r>
-          </a:p>
-        </p:txBody>
-      </p:sp>
-      <p:sp>
-        <p:nvSpPr>
-          <p:cNvPr id="7" name="Ondertitel 6">
-            <a:extLst>
-              <a:ext uri="{FF2B5EF4-FFF2-40B4-BE49-F238E27FC236}">
-                <a16:creationId xmlns:a16="http://schemas.microsoft.com/office/drawing/2014/main" id="{D9E8E9A2-429F-B15B-CA49-C31DEC204429}"/>
-              </a:ext>
-            </a:extLst>
-          </p:cNvPr>
-          <p:cNvSpPr>
-            <a:spLocks noGrp="1"/>
-          </p:cNvSpPr>
-          <p:nvPr>
-            <p:ph type="subTitle" idx="1"/>
-          </p:nvPr>
-        </p:nvSpPr>
-        <p:spPr/>
-        <p:txBody>
-          <a:bodyPr/>
-          <a:lstStyle/>
-          <a:p>
-            <a:endParaRPr lang="nl-NL"/>
-          </a:p>
-        </p:txBody>
-      </p:sp>
-      <p:pic>
-        <p:nvPicPr>
-          <p:cNvPr id="2" name="Graphic 1" descr="Vergrendelen met effen opvulling">
-            <a:extLst>
-              <a:ext uri="{FF2B5EF4-FFF2-40B4-BE49-F238E27FC236}">
-                <a16:creationId xmlns:a16="http://schemas.microsoft.com/office/drawing/2014/main" id="{95CF2834-C2AA-96DE-E94E-69CBFA3D62F1}"/>
-              </a:ext>
-            </a:extLst>
-          </p:cNvPr>
-          <p:cNvPicPr>
-            <a:picLocks noChangeAspect="1"/>
-          </p:cNvPicPr>
-          <p:nvPr/>
-        </p:nvPicPr>
-        <p:blipFill>
-          <a:blip r:embed="rId2">
-            <a:extLst>
-              <a:ext uri="{96DAC541-7B7A-43D3-8B79-37D633B846F1}">
-                <asvg:svgBlip xmlns:asvg="http://schemas.microsoft.com/office/drawing/2016/SVG/main" r:embed="rId3"/>
-              </a:ext>
-            </a:extLst>
-          </a:blip>
-          <a:stretch>
-            <a:fillRect/>
-          </a:stretch>
-        </p:blipFill>
-        <p:spPr>
-          <a:xfrm>
-            <a:off x="8194622" y="2630191"/>
-            <a:ext cx="2808157" cy="2808157"/>
-          </a:xfrm>
-          <a:prstGeom prst="rect">
-            <a:avLst/>
-          </a:prstGeom>
-        </p:spPr>
-      </p:pic>
-    </p:spTree>
-    <p:extLst>
-      <p:ext uri="{BB962C8B-B14F-4D97-AF65-F5344CB8AC3E}">
-        <p14:creationId xmlns:p14="http://schemas.microsoft.com/office/powerpoint/2010/main" val="1673476226"/>
-      </p:ext>
-    </p:extLst>
-  </p:cSld>
-  <p:clrMapOvr>
-    <a:masterClrMapping/>
-  </p:clrMapOvr>
-</p:sld>
-</file>
-
-<file path=ppt/slides/slide23.xml><?xml version="1.0" encoding="utf-8"?>
+<file path=ppt/slides/slide13.xml><?xml version="1.0" encoding="utf-8"?>
 <p:sld xmlns:a="http://schemas.openxmlformats.org/drawingml/2006/main" xmlns:r="http://schemas.openxmlformats.org/officeDocument/2006/relationships" xmlns:p="http://schemas.openxmlformats.org/presentationml/2006/main">
   <p:cSld>
     <p:spTree>
@@ -6570,132 +4930,7 @@
 </p:sld>
 </file>
 
-<file path=ppt/slides/slide24.xml><?xml version="1.0" encoding="utf-8"?>
-<p:sld xmlns:a="http://schemas.openxmlformats.org/drawingml/2006/main" xmlns:r="http://schemas.openxmlformats.org/officeDocument/2006/relationships" xmlns:p="http://schemas.openxmlformats.org/presentationml/2006/main">
-  <p:cSld>
-    <p:spTree>
-      <p:nvGrpSpPr>
-        <p:cNvPr id="1" name="">
-          <a:extLst>
-            <a:ext uri="{FF2B5EF4-FFF2-40B4-BE49-F238E27FC236}">
-              <a16:creationId xmlns:a16="http://schemas.microsoft.com/office/drawing/2014/main" id="{14CC1955-5A4E-871D-6A3A-37D280A11BC3}"/>
-            </a:ext>
-          </a:extLst>
-        </p:cNvPr>
-        <p:cNvGrpSpPr/>
-        <p:nvPr/>
-      </p:nvGrpSpPr>
-      <p:grpSpPr>
-        <a:xfrm>
-          <a:off x="0" y="0"/>
-          <a:ext cx="0" cy="0"/>
-          <a:chOff x="0" y="0"/>
-          <a:chExt cx="0" cy="0"/>
-        </a:xfrm>
-      </p:grpSpPr>
-      <p:sp>
-        <p:nvSpPr>
-          <p:cNvPr id="6" name="Titel 5">
-            <a:extLst>
-              <a:ext uri="{FF2B5EF4-FFF2-40B4-BE49-F238E27FC236}">
-                <a16:creationId xmlns:a16="http://schemas.microsoft.com/office/drawing/2014/main" id="{1F86BAEA-0A52-465A-D859-A8CED2728737}"/>
-              </a:ext>
-            </a:extLst>
-          </p:cNvPr>
-          <p:cNvSpPr>
-            <a:spLocks noGrp="1"/>
-          </p:cNvSpPr>
-          <p:nvPr>
-            <p:ph type="ctrTitle"/>
-          </p:nvPr>
-        </p:nvSpPr>
-        <p:spPr/>
-        <p:txBody>
-          <a:bodyPr/>
-          <a:lstStyle/>
-          <a:p>
-            <a:r>
-              <a:rPr lang="nl-NL" dirty="0"/>
-              <a:t>Graag even inloggen</a:t>
-            </a:r>
-          </a:p>
-        </p:txBody>
-      </p:sp>
-      <p:sp>
-        <p:nvSpPr>
-          <p:cNvPr id="7" name="Ondertitel 6">
-            <a:extLst>
-              <a:ext uri="{FF2B5EF4-FFF2-40B4-BE49-F238E27FC236}">
-                <a16:creationId xmlns:a16="http://schemas.microsoft.com/office/drawing/2014/main" id="{74864841-36C1-B795-247E-333CD01CDAB3}"/>
-              </a:ext>
-            </a:extLst>
-          </p:cNvPr>
-          <p:cNvSpPr>
-            <a:spLocks noGrp="1"/>
-          </p:cNvSpPr>
-          <p:nvPr>
-            <p:ph type="subTitle" idx="1"/>
-          </p:nvPr>
-        </p:nvSpPr>
-        <p:spPr/>
-        <p:txBody>
-          <a:bodyPr/>
-          <a:lstStyle/>
-          <a:p>
-            <a:endParaRPr lang="nl-NL"/>
-          </a:p>
-        </p:txBody>
-      </p:sp>
-      <p:pic>
-        <p:nvPicPr>
-          <p:cNvPr id="2" name="Graphic 1" descr="Vergrendelen met effen opvulling">
-            <a:extLst>
-              <a:ext uri="{FF2B5EF4-FFF2-40B4-BE49-F238E27FC236}">
-                <a16:creationId xmlns:a16="http://schemas.microsoft.com/office/drawing/2014/main" id="{B622F1E5-7414-2D2C-635C-B1FD1D5FC2AD}"/>
-              </a:ext>
-            </a:extLst>
-          </p:cNvPr>
-          <p:cNvPicPr>
-            <a:picLocks noChangeAspect="1"/>
-          </p:cNvPicPr>
-          <p:nvPr/>
-        </p:nvPicPr>
-        <p:blipFill>
-          <a:blip r:embed="rId2">
-            <a:extLst>
-              <a:ext uri="{96DAC541-7B7A-43D3-8B79-37D633B846F1}">
-                <asvg:svgBlip xmlns:asvg="http://schemas.microsoft.com/office/drawing/2016/SVG/main" r:embed="rId3"/>
-              </a:ext>
-            </a:extLst>
-          </a:blip>
-          <a:stretch>
-            <a:fillRect/>
-          </a:stretch>
-        </p:blipFill>
-        <p:spPr>
-          <a:xfrm>
-            <a:off x="8194622" y="2630191"/>
-            <a:ext cx="2808157" cy="2808157"/>
-          </a:xfrm>
-          <a:prstGeom prst="rect">
-            <a:avLst/>
-          </a:prstGeom>
-        </p:spPr>
-      </p:pic>
-    </p:spTree>
-    <p:extLst>
-      <p:ext uri="{BB962C8B-B14F-4D97-AF65-F5344CB8AC3E}">
-        <p14:creationId xmlns:p14="http://schemas.microsoft.com/office/powerpoint/2010/main" val="3739811998"/>
-      </p:ext>
-    </p:extLst>
-  </p:cSld>
-  <p:clrMapOvr>
-    <a:masterClrMapping/>
-  </p:clrMapOvr>
-</p:sld>
-</file>
-
-<file path=ppt/slides/slide25.xml><?xml version="1.0" encoding="utf-8"?>
+<file path=ppt/slides/slide14.xml><?xml version="1.0" encoding="utf-8"?>
 <p:sld xmlns:a="http://schemas.openxmlformats.org/drawingml/2006/main" xmlns:r="http://schemas.openxmlformats.org/officeDocument/2006/relationships" xmlns:p="http://schemas.openxmlformats.org/presentationml/2006/main">
   <p:cSld>
     <p:spTree>
@@ -6893,132 +5128,7 @@
 </p:sld>
 </file>
 
-<file path=ppt/slides/slide26.xml><?xml version="1.0" encoding="utf-8"?>
-<p:sld xmlns:a="http://schemas.openxmlformats.org/drawingml/2006/main" xmlns:r="http://schemas.openxmlformats.org/officeDocument/2006/relationships" xmlns:p="http://schemas.openxmlformats.org/presentationml/2006/main">
-  <p:cSld>
-    <p:spTree>
-      <p:nvGrpSpPr>
-        <p:cNvPr id="1" name="">
-          <a:extLst>
-            <a:ext uri="{FF2B5EF4-FFF2-40B4-BE49-F238E27FC236}">
-              <a16:creationId xmlns:a16="http://schemas.microsoft.com/office/drawing/2014/main" id="{5A1E43E5-E380-032E-D27E-A738E1636F0E}"/>
-            </a:ext>
-          </a:extLst>
-        </p:cNvPr>
-        <p:cNvGrpSpPr/>
-        <p:nvPr/>
-      </p:nvGrpSpPr>
-      <p:grpSpPr>
-        <a:xfrm>
-          <a:off x="0" y="0"/>
-          <a:ext cx="0" cy="0"/>
-          <a:chOff x="0" y="0"/>
-          <a:chExt cx="0" cy="0"/>
-        </a:xfrm>
-      </p:grpSpPr>
-      <p:sp>
-        <p:nvSpPr>
-          <p:cNvPr id="6" name="Titel 5">
-            <a:extLst>
-              <a:ext uri="{FF2B5EF4-FFF2-40B4-BE49-F238E27FC236}">
-                <a16:creationId xmlns:a16="http://schemas.microsoft.com/office/drawing/2014/main" id="{E5DA2147-E321-DADF-41CA-A013ABD6EE71}"/>
-              </a:ext>
-            </a:extLst>
-          </p:cNvPr>
-          <p:cNvSpPr>
-            <a:spLocks noGrp="1"/>
-          </p:cNvSpPr>
-          <p:nvPr>
-            <p:ph type="ctrTitle"/>
-          </p:nvPr>
-        </p:nvSpPr>
-        <p:spPr/>
-        <p:txBody>
-          <a:bodyPr/>
-          <a:lstStyle/>
-          <a:p>
-            <a:r>
-              <a:rPr lang="nl-NL" dirty="0"/>
-              <a:t>Graag even inloggen</a:t>
-            </a:r>
-          </a:p>
-        </p:txBody>
-      </p:sp>
-      <p:sp>
-        <p:nvSpPr>
-          <p:cNvPr id="7" name="Ondertitel 6">
-            <a:extLst>
-              <a:ext uri="{FF2B5EF4-FFF2-40B4-BE49-F238E27FC236}">
-                <a16:creationId xmlns:a16="http://schemas.microsoft.com/office/drawing/2014/main" id="{0E8693DE-95A5-6A68-3607-D0C45AF5BF18}"/>
-              </a:ext>
-            </a:extLst>
-          </p:cNvPr>
-          <p:cNvSpPr>
-            <a:spLocks noGrp="1"/>
-          </p:cNvSpPr>
-          <p:nvPr>
-            <p:ph type="subTitle" idx="1"/>
-          </p:nvPr>
-        </p:nvSpPr>
-        <p:spPr/>
-        <p:txBody>
-          <a:bodyPr/>
-          <a:lstStyle/>
-          <a:p>
-            <a:endParaRPr lang="nl-NL"/>
-          </a:p>
-        </p:txBody>
-      </p:sp>
-      <p:pic>
-        <p:nvPicPr>
-          <p:cNvPr id="2" name="Graphic 1" descr="Vergrendelen met effen opvulling">
-            <a:extLst>
-              <a:ext uri="{FF2B5EF4-FFF2-40B4-BE49-F238E27FC236}">
-                <a16:creationId xmlns:a16="http://schemas.microsoft.com/office/drawing/2014/main" id="{5ACA6B42-89F7-B6CE-B2F8-34E52809FFDA}"/>
-              </a:ext>
-            </a:extLst>
-          </p:cNvPr>
-          <p:cNvPicPr>
-            <a:picLocks noChangeAspect="1"/>
-          </p:cNvPicPr>
-          <p:nvPr/>
-        </p:nvPicPr>
-        <p:blipFill>
-          <a:blip r:embed="rId2">
-            <a:extLst>
-              <a:ext uri="{96DAC541-7B7A-43D3-8B79-37D633B846F1}">
-                <asvg:svgBlip xmlns:asvg="http://schemas.microsoft.com/office/drawing/2016/SVG/main" r:embed="rId3"/>
-              </a:ext>
-            </a:extLst>
-          </a:blip>
-          <a:stretch>
-            <a:fillRect/>
-          </a:stretch>
-        </p:blipFill>
-        <p:spPr>
-          <a:xfrm>
-            <a:off x="8194622" y="2630191"/>
-            <a:ext cx="2808157" cy="2808157"/>
-          </a:xfrm>
-          <a:prstGeom prst="rect">
-            <a:avLst/>
-          </a:prstGeom>
-        </p:spPr>
-      </p:pic>
-    </p:spTree>
-    <p:extLst>
-      <p:ext uri="{BB962C8B-B14F-4D97-AF65-F5344CB8AC3E}">
-        <p14:creationId xmlns:p14="http://schemas.microsoft.com/office/powerpoint/2010/main" val="2006418571"/>
-      </p:ext>
-    </p:extLst>
-  </p:cSld>
-  <p:clrMapOvr>
-    <a:masterClrMapping/>
-  </p:clrMapOvr>
-</p:sld>
-</file>
-
-<file path=ppt/slides/slide27.xml><?xml version="1.0" encoding="utf-8"?>
+<file path=ppt/slides/slide15.xml><?xml version="1.0" encoding="utf-8"?>
 <p:sld xmlns:a="http://schemas.openxmlformats.org/drawingml/2006/main" xmlns:r="http://schemas.openxmlformats.org/officeDocument/2006/relationships" xmlns:p="http://schemas.openxmlformats.org/presentationml/2006/main">
   <p:cSld>
     <p:spTree>
@@ -7144,132 +5254,7 @@
 </p:sld>
 </file>
 
-<file path=ppt/slides/slide28.xml><?xml version="1.0" encoding="utf-8"?>
-<p:sld xmlns:a="http://schemas.openxmlformats.org/drawingml/2006/main" xmlns:r="http://schemas.openxmlformats.org/officeDocument/2006/relationships" xmlns:p="http://schemas.openxmlformats.org/presentationml/2006/main">
-  <p:cSld>
-    <p:spTree>
-      <p:nvGrpSpPr>
-        <p:cNvPr id="1" name="">
-          <a:extLst>
-            <a:ext uri="{FF2B5EF4-FFF2-40B4-BE49-F238E27FC236}">
-              <a16:creationId xmlns:a16="http://schemas.microsoft.com/office/drawing/2014/main" id="{56AAF78D-96FD-0E6E-6EED-C32FE6F040DC}"/>
-            </a:ext>
-          </a:extLst>
-        </p:cNvPr>
-        <p:cNvGrpSpPr/>
-        <p:nvPr/>
-      </p:nvGrpSpPr>
-      <p:grpSpPr>
-        <a:xfrm>
-          <a:off x="0" y="0"/>
-          <a:ext cx="0" cy="0"/>
-          <a:chOff x="0" y="0"/>
-          <a:chExt cx="0" cy="0"/>
-        </a:xfrm>
-      </p:grpSpPr>
-      <p:sp>
-        <p:nvSpPr>
-          <p:cNvPr id="6" name="Titel 5">
-            <a:extLst>
-              <a:ext uri="{FF2B5EF4-FFF2-40B4-BE49-F238E27FC236}">
-                <a16:creationId xmlns:a16="http://schemas.microsoft.com/office/drawing/2014/main" id="{00895E18-DF0C-56D6-378C-A833DC4AA2DF}"/>
-              </a:ext>
-            </a:extLst>
-          </p:cNvPr>
-          <p:cNvSpPr>
-            <a:spLocks noGrp="1"/>
-          </p:cNvSpPr>
-          <p:nvPr>
-            <p:ph type="ctrTitle"/>
-          </p:nvPr>
-        </p:nvSpPr>
-        <p:spPr/>
-        <p:txBody>
-          <a:bodyPr/>
-          <a:lstStyle/>
-          <a:p>
-            <a:r>
-              <a:rPr lang="nl-NL" dirty="0"/>
-              <a:t>Graag even inloggen</a:t>
-            </a:r>
-          </a:p>
-        </p:txBody>
-      </p:sp>
-      <p:sp>
-        <p:nvSpPr>
-          <p:cNvPr id="7" name="Ondertitel 6">
-            <a:extLst>
-              <a:ext uri="{FF2B5EF4-FFF2-40B4-BE49-F238E27FC236}">
-                <a16:creationId xmlns:a16="http://schemas.microsoft.com/office/drawing/2014/main" id="{87F1CC17-4213-B58C-05FC-376AAF18671F}"/>
-              </a:ext>
-            </a:extLst>
-          </p:cNvPr>
-          <p:cNvSpPr>
-            <a:spLocks noGrp="1"/>
-          </p:cNvSpPr>
-          <p:nvPr>
-            <p:ph type="subTitle" idx="1"/>
-          </p:nvPr>
-        </p:nvSpPr>
-        <p:spPr/>
-        <p:txBody>
-          <a:bodyPr/>
-          <a:lstStyle/>
-          <a:p>
-            <a:endParaRPr lang="nl-NL"/>
-          </a:p>
-        </p:txBody>
-      </p:sp>
-      <p:pic>
-        <p:nvPicPr>
-          <p:cNvPr id="2" name="Graphic 1" descr="Vergrendelen met effen opvulling">
-            <a:extLst>
-              <a:ext uri="{FF2B5EF4-FFF2-40B4-BE49-F238E27FC236}">
-                <a16:creationId xmlns:a16="http://schemas.microsoft.com/office/drawing/2014/main" id="{A49B7D92-AEF9-1C0E-3CEE-69681ECEC488}"/>
-              </a:ext>
-            </a:extLst>
-          </p:cNvPr>
-          <p:cNvPicPr>
-            <a:picLocks noChangeAspect="1"/>
-          </p:cNvPicPr>
-          <p:nvPr/>
-        </p:nvPicPr>
-        <p:blipFill>
-          <a:blip r:embed="rId2">
-            <a:extLst>
-              <a:ext uri="{96DAC541-7B7A-43D3-8B79-37D633B846F1}">
-                <asvg:svgBlip xmlns:asvg="http://schemas.microsoft.com/office/drawing/2016/SVG/main" r:embed="rId3"/>
-              </a:ext>
-            </a:extLst>
-          </a:blip>
-          <a:stretch>
-            <a:fillRect/>
-          </a:stretch>
-        </p:blipFill>
-        <p:spPr>
-          <a:xfrm>
-            <a:off x="8194622" y="2630191"/>
-            <a:ext cx="2808157" cy="2808157"/>
-          </a:xfrm>
-          <a:prstGeom prst="rect">
-            <a:avLst/>
-          </a:prstGeom>
-        </p:spPr>
-      </p:pic>
-    </p:spTree>
-    <p:extLst>
-      <p:ext uri="{BB962C8B-B14F-4D97-AF65-F5344CB8AC3E}">
-        <p14:creationId xmlns:p14="http://schemas.microsoft.com/office/powerpoint/2010/main" val="2398931924"/>
-      </p:ext>
-    </p:extLst>
-  </p:cSld>
-  <p:clrMapOvr>
-    <a:masterClrMapping/>
-  </p:clrMapOvr>
-</p:sld>
-</file>
-
-<file path=ppt/slides/slide29.xml><?xml version="1.0" encoding="utf-8"?>
+<file path=ppt/slides/slide16.xml><?xml version="1.0" encoding="utf-8"?>
 <p:sld xmlns:a="http://schemas.openxmlformats.org/drawingml/2006/main" xmlns:r="http://schemas.openxmlformats.org/officeDocument/2006/relationships" xmlns:p="http://schemas.openxmlformats.org/presentationml/2006/main">
   <p:cSld>
     <p:spTree>
@@ -7414,6 +5399,911 @@
     <p:extLst>
       <p:ext uri="{BB962C8B-B14F-4D97-AF65-F5344CB8AC3E}">
         <p14:creationId xmlns:p14="http://schemas.microsoft.com/office/powerpoint/2010/main" val="3811372047"/>
+      </p:ext>
+    </p:extLst>
+  </p:cSld>
+  <p:clrMapOvr>
+    <a:masterClrMapping/>
+  </p:clrMapOvr>
+</p:sld>
+</file>
+
+<file path=ppt/slides/slide17.xml><?xml version="1.0" encoding="utf-8"?>
+<p:sld xmlns:a="http://schemas.openxmlformats.org/drawingml/2006/main" xmlns:r="http://schemas.openxmlformats.org/officeDocument/2006/relationships" xmlns:p="http://schemas.openxmlformats.org/presentationml/2006/main">
+  <p:cSld>
+    <p:spTree>
+      <p:nvGrpSpPr>
+        <p:cNvPr id="1" name=""/>
+        <p:cNvGrpSpPr/>
+        <p:nvPr/>
+      </p:nvGrpSpPr>
+      <p:grpSpPr>
+        <a:xfrm>
+          <a:off x="0" y="0"/>
+          <a:ext cx="0" cy="0"/>
+          <a:chOff x="0" y="0"/>
+          <a:chExt cx="0" cy="0"/>
+        </a:xfrm>
+      </p:grpSpPr>
+      <p:sp>
+        <p:nvSpPr>
+          <p:cNvPr id="2" name="Titel 1">
+            <a:extLst>
+              <a:ext uri="{FF2B5EF4-FFF2-40B4-BE49-F238E27FC236}">
+                <a16:creationId xmlns:a16="http://schemas.microsoft.com/office/drawing/2014/main" id="{50FCEC88-3D46-F402-7693-C4F510DB402F}"/>
+              </a:ext>
+            </a:extLst>
+          </p:cNvPr>
+          <p:cNvSpPr>
+            <a:spLocks noGrp="1"/>
+          </p:cNvSpPr>
+          <p:nvPr>
+            <p:ph type="title"/>
+          </p:nvPr>
+        </p:nvSpPr>
+        <p:spPr/>
+        <p:txBody>
+          <a:bodyPr/>
+          <a:lstStyle/>
+          <a:p>
+            <a:endParaRPr lang="nl-NL" dirty="0"/>
+          </a:p>
+        </p:txBody>
+      </p:sp>
+      <p:sp>
+        <p:nvSpPr>
+          <p:cNvPr id="3" name="Tijdelijke aanduiding voor inhoud 2">
+            <a:extLst>
+              <a:ext uri="{FF2B5EF4-FFF2-40B4-BE49-F238E27FC236}">
+                <a16:creationId xmlns:a16="http://schemas.microsoft.com/office/drawing/2014/main" id="{2826A35B-3FEA-46C1-6448-941478EAA77F}"/>
+              </a:ext>
+            </a:extLst>
+          </p:cNvPr>
+          <p:cNvSpPr>
+            <a:spLocks noGrp="1"/>
+          </p:cNvSpPr>
+          <p:nvPr>
+            <p:ph idx="1"/>
+          </p:nvPr>
+        </p:nvSpPr>
+        <p:spPr>
+          <a:xfrm>
+            <a:off x="2663420" y="1825625"/>
+            <a:ext cx="8690379" cy="3872442"/>
+          </a:xfrm>
+        </p:spPr>
+        <p:txBody>
+          <a:bodyPr/>
+          <a:lstStyle/>
+          <a:p>
+            <a:r>
+              <a:rPr lang="nl-NL" dirty="0"/>
+              <a:t>JSON Web tokens, zijn tokens die bewaard worden op een lokale browser.</a:t>
+            </a:r>
+          </a:p>
+          <a:p>
+            <a:r>
+              <a:rPr lang="nl-NL" dirty="0"/>
+              <a:t>Deze tokens voorkomen dat inloggen niet consistent nodig is voor iedere actie.</a:t>
+            </a:r>
+          </a:p>
+          <a:p>
+            <a:r>
+              <a:rPr lang="nl-NL" dirty="0"/>
+              <a:t>Vooral gebruikt voor web development maar kan ook gebruikt worden voor reguliere applicaties</a:t>
+            </a:r>
+          </a:p>
+          <a:p>
+            <a:r>
+              <a:rPr lang="nl-NL" dirty="0"/>
+              <a:t>Wordt universeel gebruikt en is makkelijk terug te zoeken in een browser, het is een type Cookie</a:t>
+            </a:r>
+          </a:p>
+          <a:p>
+            <a:endParaRPr lang="nl-NL" dirty="0"/>
+          </a:p>
+        </p:txBody>
+      </p:sp>
+      <p:pic>
+        <p:nvPicPr>
+          <p:cNvPr id="2050" name="Picture 2" descr="JSON Web Token — Explanation. JWT is used for authentication and… | by  Somesh | Medium">
+            <a:extLst>
+              <a:ext uri="{FF2B5EF4-FFF2-40B4-BE49-F238E27FC236}">
+                <a16:creationId xmlns:a16="http://schemas.microsoft.com/office/drawing/2014/main" id="{4D1E81A4-FB44-7886-D593-6ABAA71A2627}"/>
+              </a:ext>
+            </a:extLst>
+          </p:cNvPr>
+          <p:cNvPicPr>
+            <a:picLocks noChangeAspect="1" noChangeArrowheads="1"/>
+          </p:cNvPicPr>
+          <p:nvPr/>
+        </p:nvPicPr>
+        <p:blipFill>
+          <a:blip r:embed="rId2">
+            <a:extLst>
+              <a:ext uri="{28A0092B-C50C-407E-A947-70E740481C1C}">
+                <a14:useLocalDpi xmlns:a14="http://schemas.microsoft.com/office/drawing/2010/main" val="0"/>
+              </a:ext>
+            </a:extLst>
+          </a:blip>
+          <a:srcRect/>
+          <a:stretch>
+            <a:fillRect/>
+          </a:stretch>
+        </p:blipFill>
+        <p:spPr bwMode="auto">
+          <a:xfrm>
+            <a:off x="505497" y="352265"/>
+            <a:ext cx="4529840" cy="1327910"/>
+          </a:xfrm>
+          <a:prstGeom prst="rect">
+            <a:avLst/>
+          </a:prstGeom>
+          <a:noFill/>
+          <a:extLst>
+            <a:ext uri="{909E8E84-426E-40DD-AFC4-6F175D3DCCD1}">
+              <a14:hiddenFill xmlns:a14="http://schemas.microsoft.com/office/drawing/2010/main">
+                <a:solidFill>
+                  <a:srgbClr val="FFFFFF"/>
+                </a:solidFill>
+              </a14:hiddenFill>
+            </a:ext>
+          </a:extLst>
+        </p:spPr>
+      </p:pic>
+    </p:spTree>
+    <p:extLst>
+      <p:ext uri="{BB962C8B-B14F-4D97-AF65-F5344CB8AC3E}">
+        <p14:creationId xmlns:p14="http://schemas.microsoft.com/office/powerpoint/2010/main" val="1756895851"/>
+      </p:ext>
+    </p:extLst>
+  </p:cSld>
+  <p:clrMapOvr>
+    <a:masterClrMapping/>
+  </p:clrMapOvr>
+</p:sld>
+</file>
+
+<file path=ppt/slides/slide18.xml><?xml version="1.0" encoding="utf-8"?>
+<p:sld xmlns:a="http://schemas.openxmlformats.org/drawingml/2006/main" xmlns:r="http://schemas.openxmlformats.org/officeDocument/2006/relationships" xmlns:p="http://schemas.openxmlformats.org/presentationml/2006/main">
+  <p:cSld>
+    <p:spTree>
+      <p:nvGrpSpPr>
+        <p:cNvPr id="1" name=""/>
+        <p:cNvGrpSpPr/>
+        <p:nvPr/>
+      </p:nvGrpSpPr>
+      <p:grpSpPr>
+        <a:xfrm>
+          <a:off x="0" y="0"/>
+          <a:ext cx="0" cy="0"/>
+          <a:chOff x="0" y="0"/>
+          <a:chExt cx="0" cy="0"/>
+        </a:xfrm>
+      </p:grpSpPr>
+      <p:sp>
+        <p:nvSpPr>
+          <p:cNvPr id="2" name="Titel 1">
+            <a:extLst>
+              <a:ext uri="{FF2B5EF4-FFF2-40B4-BE49-F238E27FC236}">
+                <a16:creationId xmlns:a16="http://schemas.microsoft.com/office/drawing/2014/main" id="{A909D43B-085C-94D0-3743-F763D559C2BD}"/>
+              </a:ext>
+            </a:extLst>
+          </p:cNvPr>
+          <p:cNvSpPr>
+            <a:spLocks noGrp="1"/>
+          </p:cNvSpPr>
+          <p:nvPr>
+            <p:ph type="title"/>
+          </p:nvPr>
+        </p:nvSpPr>
+        <p:spPr/>
+        <p:txBody>
+          <a:bodyPr/>
+          <a:lstStyle/>
+          <a:p>
+            <a:r>
+              <a:rPr lang="nl-NL" dirty="0"/>
+              <a:t>JWT - gebruik</a:t>
+            </a:r>
+          </a:p>
+        </p:txBody>
+      </p:sp>
+      <p:sp>
+        <p:nvSpPr>
+          <p:cNvPr id="3" name="Tijdelijke aanduiding voor inhoud 2">
+            <a:extLst>
+              <a:ext uri="{FF2B5EF4-FFF2-40B4-BE49-F238E27FC236}">
+                <a16:creationId xmlns:a16="http://schemas.microsoft.com/office/drawing/2014/main" id="{51901959-0508-93D2-E083-6980228B7AF7}"/>
+              </a:ext>
+            </a:extLst>
+          </p:cNvPr>
+          <p:cNvSpPr>
+            <a:spLocks noGrp="1"/>
+          </p:cNvSpPr>
+          <p:nvPr>
+            <p:ph idx="1"/>
+          </p:nvPr>
+        </p:nvSpPr>
+        <p:spPr/>
+        <p:txBody>
+          <a:bodyPr/>
+          <a:lstStyle/>
+          <a:p>
+            <a:r>
+              <a:rPr lang="nl-NL" dirty="0"/>
+              <a:t>De gebruiker logt in.</a:t>
+            </a:r>
+          </a:p>
+          <a:p>
+            <a:r>
+              <a:rPr lang="nl-NL" dirty="0"/>
+              <a:t>De gegevens worden gecontroleerd</a:t>
+            </a:r>
+          </a:p>
+          <a:p>
+            <a:r>
+              <a:rPr lang="nl-NL" dirty="0"/>
+              <a:t>De server maakt een token aan die gekoppeld is aan een gebruiker en tijdsframe. (Soms ook IP bij hoge beveiliging)</a:t>
+            </a:r>
+          </a:p>
+          <a:p>
+            <a:r>
+              <a:rPr lang="nl-NL" dirty="0"/>
+              <a:t>De gebruiker kan nu doen wat hij/zij wilt tot de gebruiker uitlogt of tot de tijd op is.</a:t>
+            </a:r>
+          </a:p>
+        </p:txBody>
+      </p:sp>
+      <p:pic>
+        <p:nvPicPr>
+          <p:cNvPr id="4098" name="Picture 2" descr="MILK CHOCOLATE CHIP COOKIE XL">
+            <a:extLst>
+              <a:ext uri="{FF2B5EF4-FFF2-40B4-BE49-F238E27FC236}">
+                <a16:creationId xmlns:a16="http://schemas.microsoft.com/office/drawing/2014/main" id="{85302E53-A903-F88A-0A2F-94EF1BBC74A9}"/>
+              </a:ext>
+            </a:extLst>
+          </p:cNvPr>
+          <p:cNvPicPr>
+            <a:picLocks noChangeAspect="1" noChangeArrowheads="1"/>
+          </p:cNvPicPr>
+          <p:nvPr/>
+        </p:nvPicPr>
+        <p:blipFill>
+          <a:blip r:embed="rId2">
+            <a:extLst>
+              <a:ext uri="{28A0092B-C50C-407E-A947-70E740481C1C}">
+                <a14:useLocalDpi xmlns:a14="http://schemas.microsoft.com/office/drawing/2010/main" val="0"/>
+              </a:ext>
+            </a:extLst>
+          </a:blip>
+          <a:srcRect/>
+          <a:stretch>
+            <a:fillRect/>
+          </a:stretch>
+        </p:blipFill>
+        <p:spPr bwMode="auto">
+          <a:xfrm>
+            <a:off x="10486312" y="39418"/>
+            <a:ext cx="1497074" cy="1497074"/>
+          </a:xfrm>
+          <a:prstGeom prst="rect">
+            <a:avLst/>
+          </a:prstGeom>
+          <a:noFill/>
+          <a:extLst>
+            <a:ext uri="{909E8E84-426E-40DD-AFC4-6F175D3DCCD1}">
+              <a14:hiddenFill xmlns:a14="http://schemas.microsoft.com/office/drawing/2010/main">
+                <a:solidFill>
+                  <a:srgbClr val="FFFFFF"/>
+                </a:solidFill>
+              </a14:hiddenFill>
+            </a:ext>
+          </a:extLst>
+        </p:spPr>
+      </p:pic>
+    </p:spTree>
+    <p:extLst>
+      <p:ext uri="{BB962C8B-B14F-4D97-AF65-F5344CB8AC3E}">
+        <p14:creationId xmlns:p14="http://schemas.microsoft.com/office/powerpoint/2010/main" val="3310567775"/>
+      </p:ext>
+    </p:extLst>
+  </p:cSld>
+  <p:clrMapOvr>
+    <a:masterClrMapping/>
+  </p:clrMapOvr>
+</p:sld>
+</file>
+
+<file path=ppt/slides/slide19.xml><?xml version="1.0" encoding="utf-8"?>
+<p:sld xmlns:a="http://schemas.openxmlformats.org/drawingml/2006/main" xmlns:r="http://schemas.openxmlformats.org/officeDocument/2006/relationships" xmlns:p="http://schemas.openxmlformats.org/presentationml/2006/main">
+  <p:cSld>
+    <p:spTree>
+      <p:nvGrpSpPr>
+        <p:cNvPr id="1" name="">
+          <a:extLst>
+            <a:ext uri="{FF2B5EF4-FFF2-40B4-BE49-F238E27FC236}">
+              <a16:creationId xmlns:a16="http://schemas.microsoft.com/office/drawing/2014/main" id="{38A174A3-A094-CDC8-71E9-4795D35A155C}"/>
+            </a:ext>
+          </a:extLst>
+        </p:cNvPr>
+        <p:cNvGrpSpPr/>
+        <p:nvPr/>
+      </p:nvGrpSpPr>
+      <p:grpSpPr>
+        <a:xfrm>
+          <a:off x="0" y="0"/>
+          <a:ext cx="0" cy="0"/>
+          <a:chOff x="0" y="0"/>
+          <a:chExt cx="0" cy="0"/>
+        </a:xfrm>
+      </p:grpSpPr>
+      <p:sp>
+        <p:nvSpPr>
+          <p:cNvPr id="2" name="Titel 1">
+            <a:extLst>
+              <a:ext uri="{FF2B5EF4-FFF2-40B4-BE49-F238E27FC236}">
+                <a16:creationId xmlns:a16="http://schemas.microsoft.com/office/drawing/2014/main" id="{20D44702-6029-CE5F-93CA-1840BCACA1C0}"/>
+              </a:ext>
+            </a:extLst>
+          </p:cNvPr>
+          <p:cNvSpPr>
+            <a:spLocks noGrp="1"/>
+          </p:cNvSpPr>
+          <p:nvPr>
+            <p:ph type="title"/>
+          </p:nvPr>
+        </p:nvSpPr>
+        <p:spPr/>
+        <p:txBody>
+          <a:bodyPr/>
+          <a:lstStyle/>
+          <a:p>
+            <a:r>
+              <a:rPr lang="nl-NL" dirty="0"/>
+              <a:t>JWT – gebruik in code</a:t>
+            </a:r>
+          </a:p>
+        </p:txBody>
+      </p:sp>
+      <p:sp>
+        <p:nvSpPr>
+          <p:cNvPr id="3" name="Tijdelijke aanduiding voor inhoud 2">
+            <a:extLst>
+              <a:ext uri="{FF2B5EF4-FFF2-40B4-BE49-F238E27FC236}">
+                <a16:creationId xmlns:a16="http://schemas.microsoft.com/office/drawing/2014/main" id="{44BC2A6B-5654-A801-F9F0-2F2EA86CA16C}"/>
+              </a:ext>
+            </a:extLst>
+          </p:cNvPr>
+          <p:cNvSpPr>
+            <a:spLocks noGrp="1"/>
+          </p:cNvSpPr>
+          <p:nvPr>
+            <p:ph idx="1"/>
+          </p:nvPr>
+        </p:nvSpPr>
+        <p:spPr/>
+        <p:txBody>
+          <a:bodyPr/>
+          <a:lstStyle/>
+          <a:p>
+            <a:r>
+              <a:rPr lang="nl-NL" dirty="0"/>
+              <a:t>(Bijna) iedere taal heeft een package waarmee je JWT kan genereren, vereist vaak een </a:t>
+            </a:r>
+            <a:r>
+              <a:rPr lang="nl-NL" dirty="0" err="1"/>
+              <a:t>install</a:t>
+            </a:r>
+            <a:r>
+              <a:rPr lang="nl-NL" dirty="0"/>
+              <a:t>.</a:t>
+            </a:r>
+          </a:p>
+          <a:p>
+            <a:r>
+              <a:rPr lang="nl-NL" dirty="0"/>
+              <a:t>Je maakt een private key van random letters en cijfers. </a:t>
+            </a:r>
+          </a:p>
+          <a:p>
+            <a:r>
+              <a:rPr lang="nl-NL" dirty="0"/>
+              <a:t>Laat JWT het generen</a:t>
+            </a:r>
+          </a:p>
+          <a:p>
+            <a:r>
+              <a:rPr lang="nl-NL" dirty="0"/>
+              <a:t>Stuurt het op naar de gebruiker, deze slaat het op in de browser</a:t>
+            </a:r>
+          </a:p>
+          <a:p>
+            <a:r>
+              <a:rPr lang="nl-NL" dirty="0"/>
+              <a:t>De gebruiker stuurt met iedere actie de JWT mee.</a:t>
+            </a:r>
+          </a:p>
+          <a:p>
+            <a:r>
+              <a:rPr lang="nl-NL" dirty="0"/>
+              <a:t>JWT controleert zichzelf of de actie nog kan en of de juiste persoon acties uitvoert.</a:t>
+            </a:r>
+          </a:p>
+        </p:txBody>
+      </p:sp>
+      <p:pic>
+        <p:nvPicPr>
+          <p:cNvPr id="4098" name="Picture 2" descr="MILK CHOCOLATE CHIP COOKIE XL">
+            <a:extLst>
+              <a:ext uri="{FF2B5EF4-FFF2-40B4-BE49-F238E27FC236}">
+                <a16:creationId xmlns:a16="http://schemas.microsoft.com/office/drawing/2014/main" id="{377C670B-908B-9CC4-9449-299F4A718167}"/>
+              </a:ext>
+            </a:extLst>
+          </p:cNvPr>
+          <p:cNvPicPr>
+            <a:picLocks noChangeAspect="1" noChangeArrowheads="1"/>
+          </p:cNvPicPr>
+          <p:nvPr/>
+        </p:nvPicPr>
+        <p:blipFill>
+          <a:blip r:embed="rId2">
+            <a:extLst>
+              <a:ext uri="{28A0092B-C50C-407E-A947-70E740481C1C}">
+                <a14:useLocalDpi xmlns:a14="http://schemas.microsoft.com/office/drawing/2010/main" val="0"/>
+              </a:ext>
+            </a:extLst>
+          </a:blip>
+          <a:srcRect/>
+          <a:stretch>
+            <a:fillRect/>
+          </a:stretch>
+        </p:blipFill>
+        <p:spPr bwMode="auto">
+          <a:xfrm>
+            <a:off x="10486312" y="39418"/>
+            <a:ext cx="1497074" cy="1497074"/>
+          </a:xfrm>
+          <a:prstGeom prst="rect">
+            <a:avLst/>
+          </a:prstGeom>
+          <a:noFill/>
+          <a:extLst>
+            <a:ext uri="{909E8E84-426E-40DD-AFC4-6F175D3DCCD1}">
+              <a14:hiddenFill xmlns:a14="http://schemas.microsoft.com/office/drawing/2010/main">
+                <a:solidFill>
+                  <a:srgbClr val="FFFFFF"/>
+                </a:solidFill>
+              </a14:hiddenFill>
+            </a:ext>
+          </a:extLst>
+        </p:spPr>
+      </p:pic>
+    </p:spTree>
+    <p:extLst>
+      <p:ext uri="{BB962C8B-B14F-4D97-AF65-F5344CB8AC3E}">
+        <p14:creationId xmlns:p14="http://schemas.microsoft.com/office/powerpoint/2010/main" val="592439833"/>
+      </p:ext>
+    </p:extLst>
+  </p:cSld>
+  <p:clrMapOvr>
+    <a:masterClrMapping/>
+  </p:clrMapOvr>
+</p:sld>
+</file>
+
+<file path=ppt/slides/slide2.xml><?xml version="1.0" encoding="utf-8"?>
+<p:sld xmlns:a="http://schemas.openxmlformats.org/drawingml/2006/main" xmlns:r="http://schemas.openxmlformats.org/officeDocument/2006/relationships" xmlns:p="http://schemas.openxmlformats.org/presentationml/2006/main">
+  <p:cSld>
+    <p:spTree>
+      <p:nvGrpSpPr>
+        <p:cNvPr id="1" name=""/>
+        <p:cNvGrpSpPr/>
+        <p:nvPr/>
+      </p:nvGrpSpPr>
+      <p:grpSpPr>
+        <a:xfrm>
+          <a:off x="0" y="0"/>
+          <a:ext cx="0" cy="0"/>
+          <a:chOff x="0" y="0"/>
+          <a:chExt cx="0" cy="0"/>
+        </a:xfrm>
+      </p:grpSpPr>
+      <p:sp>
+        <p:nvSpPr>
+          <p:cNvPr id="2" name="Titel 1">
+            <a:extLst>
+              <a:ext uri="{FF2B5EF4-FFF2-40B4-BE49-F238E27FC236}">
+                <a16:creationId xmlns:a16="http://schemas.microsoft.com/office/drawing/2014/main" id="{BBC467E5-39E6-9E7F-1C58-661632973934}"/>
+              </a:ext>
+            </a:extLst>
+          </p:cNvPr>
+          <p:cNvSpPr>
+            <a:spLocks noGrp="1"/>
+          </p:cNvSpPr>
+          <p:nvPr>
+            <p:ph type="title"/>
+          </p:nvPr>
+        </p:nvSpPr>
+        <p:spPr/>
+        <p:txBody>
+          <a:bodyPr/>
+          <a:lstStyle/>
+          <a:p>
+            <a:r>
+              <a:rPr lang="nl-NL" dirty="0"/>
+              <a:t>Programma</a:t>
+            </a:r>
+          </a:p>
+        </p:txBody>
+      </p:sp>
+      <p:sp>
+        <p:nvSpPr>
+          <p:cNvPr id="3" name="Tijdelijke aanduiding voor inhoud 2">
+            <a:extLst>
+              <a:ext uri="{FF2B5EF4-FFF2-40B4-BE49-F238E27FC236}">
+                <a16:creationId xmlns:a16="http://schemas.microsoft.com/office/drawing/2014/main" id="{DE110306-4AAB-9607-E18E-ACBAC34BDE30}"/>
+              </a:ext>
+            </a:extLst>
+          </p:cNvPr>
+          <p:cNvSpPr>
+            <a:spLocks noGrp="1"/>
+          </p:cNvSpPr>
+          <p:nvPr>
+            <p:ph idx="1"/>
+          </p:nvPr>
+        </p:nvSpPr>
+        <p:spPr/>
+        <p:txBody>
+          <a:bodyPr/>
+          <a:lstStyle/>
+          <a:p>
+            <a:r>
+              <a:rPr lang="nl-NL" dirty="0"/>
+              <a:t>Terugblik vorige les</a:t>
+            </a:r>
+          </a:p>
+          <a:p>
+            <a:r>
+              <a:rPr lang="nl-NL" dirty="0"/>
+              <a:t>Leerdoelen</a:t>
+            </a:r>
+          </a:p>
+          <a:p>
+            <a:r>
+              <a:rPr lang="nl-NL" dirty="0"/>
+              <a:t>Database </a:t>
+            </a:r>
+            <a:r>
+              <a:rPr lang="nl-NL" dirty="0" err="1"/>
+              <a:t>secruity</a:t>
+            </a:r>
+            <a:endParaRPr lang="nl-NL" dirty="0"/>
+          </a:p>
+          <a:p>
+            <a:r>
+              <a:rPr lang="nl-NL" dirty="0"/>
+              <a:t>Database </a:t>
+            </a:r>
+            <a:r>
+              <a:rPr lang="nl-NL" dirty="0" err="1"/>
+              <a:t>injections</a:t>
+            </a:r>
+            <a:endParaRPr lang="nl-NL" dirty="0"/>
+          </a:p>
+          <a:p>
+            <a:r>
+              <a:rPr lang="nl-NL" dirty="0"/>
+              <a:t>JWT</a:t>
+            </a:r>
+          </a:p>
+          <a:p>
+            <a:r>
+              <a:rPr lang="nl-NL" dirty="0"/>
+              <a:t>Volgende week</a:t>
+            </a:r>
+          </a:p>
+        </p:txBody>
+      </p:sp>
+    </p:spTree>
+    <p:extLst>
+      <p:ext uri="{BB962C8B-B14F-4D97-AF65-F5344CB8AC3E}">
+        <p14:creationId xmlns:p14="http://schemas.microsoft.com/office/powerpoint/2010/main" val="3969768279"/>
+      </p:ext>
+    </p:extLst>
+  </p:cSld>
+  <p:clrMapOvr>
+    <a:masterClrMapping/>
+  </p:clrMapOvr>
+</p:sld>
+</file>
+
+<file path=ppt/slides/slide20.xml><?xml version="1.0" encoding="utf-8"?>
+<p:sld xmlns:a="http://schemas.openxmlformats.org/drawingml/2006/main" xmlns:r="http://schemas.openxmlformats.org/officeDocument/2006/relationships" xmlns:p="http://schemas.openxmlformats.org/presentationml/2006/main">
+  <p:cSld>
+    <p:spTree>
+      <p:nvGrpSpPr>
+        <p:cNvPr id="1" name=""/>
+        <p:cNvGrpSpPr/>
+        <p:nvPr/>
+      </p:nvGrpSpPr>
+      <p:grpSpPr>
+        <a:xfrm>
+          <a:off x="0" y="0"/>
+          <a:ext cx="0" cy="0"/>
+          <a:chOff x="0" y="0"/>
+          <a:chExt cx="0" cy="0"/>
+        </a:xfrm>
+      </p:grpSpPr>
+      <p:sp>
+        <p:nvSpPr>
+          <p:cNvPr id="2" name="Titel 1">
+            <a:extLst>
+              <a:ext uri="{FF2B5EF4-FFF2-40B4-BE49-F238E27FC236}">
+                <a16:creationId xmlns:a16="http://schemas.microsoft.com/office/drawing/2014/main" id="{AA9D8D61-0B66-4C27-EF35-7FD222DE7F05}"/>
+              </a:ext>
+            </a:extLst>
+          </p:cNvPr>
+          <p:cNvSpPr>
+            <a:spLocks noGrp="1"/>
+          </p:cNvSpPr>
+          <p:nvPr>
+            <p:ph type="title"/>
+          </p:nvPr>
+        </p:nvSpPr>
+        <p:spPr/>
+        <p:txBody>
+          <a:bodyPr/>
+          <a:lstStyle/>
+          <a:p>
+            <a:r>
+              <a:rPr lang="nl-NL" dirty="0"/>
+              <a:t>Opdrachten: Database </a:t>
+            </a:r>
+            <a:r>
+              <a:rPr lang="nl-NL" dirty="0" err="1"/>
+              <a:t>injections</a:t>
+            </a:r>
+            <a:r>
+              <a:rPr lang="nl-NL" dirty="0"/>
+              <a:t> &amp; JWT</a:t>
+            </a:r>
+          </a:p>
+        </p:txBody>
+      </p:sp>
+      <p:sp>
+        <p:nvSpPr>
+          <p:cNvPr id="3" name="Tijdelijke aanduiding voor inhoud 2">
+            <a:extLst>
+              <a:ext uri="{FF2B5EF4-FFF2-40B4-BE49-F238E27FC236}">
+                <a16:creationId xmlns:a16="http://schemas.microsoft.com/office/drawing/2014/main" id="{73D65B2C-0B29-6837-1A38-EBF4B3F9DA5A}"/>
+              </a:ext>
+            </a:extLst>
+          </p:cNvPr>
+          <p:cNvSpPr>
+            <a:spLocks noGrp="1"/>
+          </p:cNvSpPr>
+          <p:nvPr>
+            <p:ph idx="1"/>
+          </p:nvPr>
+        </p:nvSpPr>
+        <p:spPr/>
+        <p:txBody>
+          <a:bodyPr/>
+          <a:lstStyle/>
+          <a:p>
+            <a:r>
+              <a:rPr lang="nl-NL" dirty="0"/>
+              <a:t>Twee opdrachten deze week:</a:t>
+            </a:r>
+          </a:p>
+          <a:p>
+            <a:pPr lvl="1"/>
+            <a:r>
+              <a:rPr lang="nl-NL" dirty="0"/>
+              <a:t>Database </a:t>
+            </a:r>
+            <a:r>
+              <a:rPr lang="nl-NL" dirty="0" err="1"/>
+              <a:t>injection</a:t>
+            </a:r>
+            <a:r>
+              <a:rPr lang="nl-NL" dirty="0"/>
+              <a:t> oefening met de mogelijkheid om een database te manipuleren op wijze die niet bedoeld zijn. </a:t>
+            </a:r>
+          </a:p>
+          <a:p>
+            <a:pPr lvl="1"/>
+            <a:endParaRPr lang="nl-NL" dirty="0"/>
+          </a:p>
+          <a:p>
+            <a:pPr lvl="1"/>
+            <a:r>
+              <a:rPr lang="nl-NL" dirty="0"/>
+              <a:t>JWT oefening waarmee je een tijdelijke token kan maken en gebruik ervan maken. </a:t>
+            </a:r>
+          </a:p>
+        </p:txBody>
+      </p:sp>
+    </p:spTree>
+    <p:extLst>
+      <p:ext uri="{BB962C8B-B14F-4D97-AF65-F5344CB8AC3E}">
+        <p14:creationId xmlns:p14="http://schemas.microsoft.com/office/powerpoint/2010/main" val="2464847785"/>
+      </p:ext>
+    </p:extLst>
+  </p:cSld>
+  <p:clrMapOvr>
+    <a:masterClrMapping/>
+  </p:clrMapOvr>
+</p:sld>
+</file>
+
+<file path=ppt/slides/slide21.xml><?xml version="1.0" encoding="utf-8"?>
+<p:sld xmlns:a="http://schemas.openxmlformats.org/drawingml/2006/main" xmlns:r="http://schemas.openxmlformats.org/officeDocument/2006/relationships" xmlns:p="http://schemas.openxmlformats.org/presentationml/2006/main">
+  <p:cSld>
+    <p:spTree>
+      <p:nvGrpSpPr>
+        <p:cNvPr id="1" name=""/>
+        <p:cNvGrpSpPr/>
+        <p:nvPr/>
+      </p:nvGrpSpPr>
+      <p:grpSpPr>
+        <a:xfrm>
+          <a:off x="0" y="0"/>
+          <a:ext cx="0" cy="0"/>
+          <a:chOff x="0" y="0"/>
+          <a:chExt cx="0" cy="0"/>
+        </a:xfrm>
+      </p:grpSpPr>
+      <p:sp>
+        <p:nvSpPr>
+          <p:cNvPr id="2" name="Titel 1">
+            <a:extLst>
+              <a:ext uri="{FF2B5EF4-FFF2-40B4-BE49-F238E27FC236}">
+                <a16:creationId xmlns:a16="http://schemas.microsoft.com/office/drawing/2014/main" id="{B11A3F00-D22C-8C45-2591-74E8FD01CE37}"/>
+              </a:ext>
+            </a:extLst>
+          </p:cNvPr>
+          <p:cNvSpPr>
+            <a:spLocks noGrp="1"/>
+          </p:cNvSpPr>
+          <p:nvPr>
+            <p:ph type="title"/>
+          </p:nvPr>
+        </p:nvSpPr>
+        <p:spPr>
+          <a:xfrm>
+            <a:off x="838200" y="365125"/>
+            <a:ext cx="10515600" cy="1325563"/>
+          </a:xfrm>
+        </p:spPr>
+        <p:txBody>
+          <a:bodyPr anchor="ctr">
+            <a:normAutofit/>
+          </a:bodyPr>
+          <a:lstStyle/>
+          <a:p>
+            <a:r>
+              <a:rPr lang="nl-NL" dirty="0"/>
+              <a:t>Volgende week</a:t>
+            </a:r>
+          </a:p>
+        </p:txBody>
+      </p:sp>
+      <p:sp>
+        <p:nvSpPr>
+          <p:cNvPr id="3" name="Tijdelijke aanduiding voor inhoud 2">
+            <a:extLst>
+              <a:ext uri="{FF2B5EF4-FFF2-40B4-BE49-F238E27FC236}">
+                <a16:creationId xmlns:a16="http://schemas.microsoft.com/office/drawing/2014/main" id="{A186008C-654E-6F3B-AA1A-BDA418F9A75C}"/>
+              </a:ext>
+            </a:extLst>
+          </p:cNvPr>
+          <p:cNvSpPr>
+            <a:spLocks noGrp="1"/>
+          </p:cNvSpPr>
+          <p:nvPr>
+            <p:ph sz="half" idx="1"/>
+          </p:nvPr>
+        </p:nvSpPr>
+        <p:spPr>
+          <a:xfrm>
+            <a:off x="838200" y="1825625"/>
+            <a:ext cx="5181600" cy="4018584"/>
+          </a:xfrm>
+        </p:spPr>
+        <p:txBody>
+          <a:bodyPr>
+            <a:normAutofit/>
+          </a:bodyPr>
+          <a:lstStyle/>
+          <a:p>
+            <a:r>
+              <a:rPr lang="nl-NL" dirty="0"/>
+              <a:t>Netwerken</a:t>
+            </a:r>
+          </a:p>
+          <a:p>
+            <a:pPr lvl="1"/>
+            <a:r>
+              <a:rPr lang="nl-NL" sz="2800"/>
+              <a:t>Afluisteren</a:t>
+            </a:r>
+          </a:p>
+          <a:p>
+            <a:pPr lvl="1"/>
+            <a:r>
+              <a:rPr lang="nl-NL" sz="2800"/>
+              <a:t>Beschermen</a:t>
+            </a:r>
+          </a:p>
+          <a:p>
+            <a:pPr lvl="1"/>
+            <a:r>
+              <a:rPr lang="nl-NL" sz="2800"/>
+              <a:t>VPN</a:t>
+            </a:r>
+          </a:p>
+          <a:p>
+            <a:r>
+              <a:rPr lang="nl-NL" dirty="0"/>
+              <a:t>Man in de </a:t>
+            </a:r>
+            <a:r>
+              <a:rPr lang="nl-NL" dirty="0" err="1"/>
+              <a:t>middle</a:t>
+            </a:r>
+            <a:endParaRPr lang="nl-NL" dirty="0"/>
+          </a:p>
+          <a:p>
+            <a:r>
+              <a:rPr lang="nl-NL" dirty="0" err="1"/>
+              <a:t>Wireshark</a:t>
+            </a:r>
+            <a:endParaRPr lang="nl-NL" dirty="0"/>
+          </a:p>
+        </p:txBody>
+      </p:sp>
+      <p:pic>
+        <p:nvPicPr>
+          <p:cNvPr id="5" name="Graphic 4" descr="Verbindingen silhouet">
+            <a:extLst>
+              <a:ext uri="{FF2B5EF4-FFF2-40B4-BE49-F238E27FC236}">
+                <a16:creationId xmlns:a16="http://schemas.microsoft.com/office/drawing/2014/main" id="{6C760D15-C48F-6D52-7C29-70292DD61793}"/>
+              </a:ext>
+            </a:extLst>
+          </p:cNvPr>
+          <p:cNvPicPr>
+            <a:picLocks noChangeAspect="1"/>
+          </p:cNvPicPr>
+          <p:nvPr/>
+        </p:nvPicPr>
+        <p:blipFill>
+          <a:blip r:embed="rId2">
+            <a:extLst>
+              <a:ext uri="{96DAC541-7B7A-43D3-8B79-37D633B846F1}">
+                <asvg:svgBlip xmlns:asvg="http://schemas.microsoft.com/office/drawing/2016/SVG/main" r:embed="rId3"/>
+              </a:ext>
+            </a:extLst>
+          </a:blip>
+          <a:stretch>
+            <a:fillRect/>
+          </a:stretch>
+        </p:blipFill>
+        <p:spPr>
+          <a:xfrm>
+            <a:off x="6753708" y="1825625"/>
+            <a:ext cx="4018584" cy="4018584"/>
+          </a:xfrm>
+          <a:prstGeom prst="rect">
+            <a:avLst/>
+          </a:prstGeom>
+        </p:spPr>
+      </p:pic>
+    </p:spTree>
+    <p:extLst>
+      <p:ext uri="{BB962C8B-B14F-4D97-AF65-F5344CB8AC3E}">
+        <p14:creationId xmlns:p14="http://schemas.microsoft.com/office/powerpoint/2010/main" val="2527215279"/>
       </p:ext>
     </p:extLst>
   </p:cSld>
@@ -7650,1334 +6540,6 @@
 </p:sld>
 </file>
 
-<file path=ppt/slides/slide30.xml><?xml version="1.0" encoding="utf-8"?>
-<p:sld xmlns:a="http://schemas.openxmlformats.org/drawingml/2006/main" xmlns:r="http://schemas.openxmlformats.org/officeDocument/2006/relationships" xmlns:p="http://schemas.openxmlformats.org/presentationml/2006/main">
-  <p:cSld>
-    <p:spTree>
-      <p:nvGrpSpPr>
-        <p:cNvPr id="1" name="">
-          <a:extLst>
-            <a:ext uri="{FF2B5EF4-FFF2-40B4-BE49-F238E27FC236}">
-              <a16:creationId xmlns:a16="http://schemas.microsoft.com/office/drawing/2014/main" id="{8A5B73B3-9EB4-4ADF-C129-B9957BBBBA2D}"/>
-            </a:ext>
-          </a:extLst>
-        </p:cNvPr>
-        <p:cNvGrpSpPr/>
-        <p:nvPr/>
-      </p:nvGrpSpPr>
-      <p:grpSpPr>
-        <a:xfrm>
-          <a:off x="0" y="0"/>
-          <a:ext cx="0" cy="0"/>
-          <a:chOff x="0" y="0"/>
-          <a:chExt cx="0" cy="0"/>
-        </a:xfrm>
-      </p:grpSpPr>
-      <p:sp>
-        <p:nvSpPr>
-          <p:cNvPr id="6" name="Titel 5">
-            <a:extLst>
-              <a:ext uri="{FF2B5EF4-FFF2-40B4-BE49-F238E27FC236}">
-                <a16:creationId xmlns:a16="http://schemas.microsoft.com/office/drawing/2014/main" id="{A7245489-9938-61EC-1630-CEA982649C10}"/>
-              </a:ext>
-            </a:extLst>
-          </p:cNvPr>
-          <p:cNvSpPr>
-            <a:spLocks noGrp="1"/>
-          </p:cNvSpPr>
-          <p:nvPr>
-            <p:ph type="ctrTitle"/>
-          </p:nvPr>
-        </p:nvSpPr>
-        <p:spPr/>
-        <p:txBody>
-          <a:bodyPr/>
-          <a:lstStyle/>
-          <a:p>
-            <a:r>
-              <a:rPr lang="nl-NL" dirty="0"/>
-              <a:t>Graag even inloggen</a:t>
-            </a:r>
-          </a:p>
-        </p:txBody>
-      </p:sp>
-      <p:sp>
-        <p:nvSpPr>
-          <p:cNvPr id="7" name="Ondertitel 6">
-            <a:extLst>
-              <a:ext uri="{FF2B5EF4-FFF2-40B4-BE49-F238E27FC236}">
-                <a16:creationId xmlns:a16="http://schemas.microsoft.com/office/drawing/2014/main" id="{FBFD8180-ED9C-3070-B309-1772DC97A08F}"/>
-              </a:ext>
-            </a:extLst>
-          </p:cNvPr>
-          <p:cNvSpPr>
-            <a:spLocks noGrp="1"/>
-          </p:cNvSpPr>
-          <p:nvPr>
-            <p:ph type="subTitle" idx="1"/>
-          </p:nvPr>
-        </p:nvSpPr>
-        <p:spPr/>
-        <p:txBody>
-          <a:bodyPr/>
-          <a:lstStyle/>
-          <a:p>
-            <a:endParaRPr lang="nl-NL"/>
-          </a:p>
-        </p:txBody>
-      </p:sp>
-      <p:pic>
-        <p:nvPicPr>
-          <p:cNvPr id="2" name="Graphic 1" descr="Vergrendelen met effen opvulling">
-            <a:extLst>
-              <a:ext uri="{FF2B5EF4-FFF2-40B4-BE49-F238E27FC236}">
-                <a16:creationId xmlns:a16="http://schemas.microsoft.com/office/drawing/2014/main" id="{4A6FA4BB-E97A-C726-5C3E-57B076B65DD3}"/>
-              </a:ext>
-            </a:extLst>
-          </p:cNvPr>
-          <p:cNvPicPr>
-            <a:picLocks noChangeAspect="1"/>
-          </p:cNvPicPr>
-          <p:nvPr/>
-        </p:nvPicPr>
-        <p:blipFill>
-          <a:blip r:embed="rId2">
-            <a:extLst>
-              <a:ext uri="{96DAC541-7B7A-43D3-8B79-37D633B846F1}">
-                <asvg:svgBlip xmlns:asvg="http://schemas.microsoft.com/office/drawing/2016/SVG/main" r:embed="rId3"/>
-              </a:ext>
-            </a:extLst>
-          </a:blip>
-          <a:stretch>
-            <a:fillRect/>
-          </a:stretch>
-        </p:blipFill>
-        <p:spPr>
-          <a:xfrm>
-            <a:off x="8194622" y="2630191"/>
-            <a:ext cx="2808157" cy="2808157"/>
-          </a:xfrm>
-          <a:prstGeom prst="rect">
-            <a:avLst/>
-          </a:prstGeom>
-        </p:spPr>
-      </p:pic>
-    </p:spTree>
-    <p:extLst>
-      <p:ext uri="{BB962C8B-B14F-4D97-AF65-F5344CB8AC3E}">
-        <p14:creationId xmlns:p14="http://schemas.microsoft.com/office/powerpoint/2010/main" val="127829543"/>
-      </p:ext>
-    </p:extLst>
-  </p:cSld>
-  <p:clrMapOvr>
-    <a:masterClrMapping/>
-  </p:clrMapOvr>
-</p:sld>
-</file>
-
-<file path=ppt/slides/slide31.xml><?xml version="1.0" encoding="utf-8"?>
-<p:sld xmlns:a="http://schemas.openxmlformats.org/drawingml/2006/main" xmlns:r="http://schemas.openxmlformats.org/officeDocument/2006/relationships" xmlns:p="http://schemas.openxmlformats.org/presentationml/2006/main">
-  <p:cSld>
-    <p:spTree>
-      <p:nvGrpSpPr>
-        <p:cNvPr id="1" name=""/>
-        <p:cNvGrpSpPr/>
-        <p:nvPr/>
-      </p:nvGrpSpPr>
-      <p:grpSpPr>
-        <a:xfrm>
-          <a:off x="0" y="0"/>
-          <a:ext cx="0" cy="0"/>
-          <a:chOff x="0" y="0"/>
-          <a:chExt cx="0" cy="0"/>
-        </a:xfrm>
-      </p:grpSpPr>
-      <p:sp>
-        <p:nvSpPr>
-          <p:cNvPr id="2" name="Titel 1">
-            <a:extLst>
-              <a:ext uri="{FF2B5EF4-FFF2-40B4-BE49-F238E27FC236}">
-                <a16:creationId xmlns:a16="http://schemas.microsoft.com/office/drawing/2014/main" id="{F01C623F-8EDD-04A0-7256-DD23FAC9E09B}"/>
-              </a:ext>
-            </a:extLst>
-          </p:cNvPr>
-          <p:cNvSpPr>
-            <a:spLocks noGrp="1"/>
-          </p:cNvSpPr>
-          <p:nvPr>
-            <p:ph type="title"/>
-          </p:nvPr>
-        </p:nvSpPr>
-        <p:spPr/>
-        <p:txBody>
-          <a:bodyPr/>
-          <a:lstStyle/>
-          <a:p>
-            <a:r>
-              <a:rPr lang="nl-NL" dirty="0"/>
-              <a:t>Opdracht op </a:t>
-            </a:r>
-            <a:r>
-              <a:rPr lang="nl-NL" dirty="0" err="1"/>
-              <a:t>github</a:t>
-            </a:r>
-            <a:endParaRPr lang="nl-NL" dirty="0"/>
-          </a:p>
-        </p:txBody>
-      </p:sp>
-      <p:sp>
-        <p:nvSpPr>
-          <p:cNvPr id="3" name="Tijdelijke aanduiding voor inhoud 2">
-            <a:extLst>
-              <a:ext uri="{FF2B5EF4-FFF2-40B4-BE49-F238E27FC236}">
-                <a16:creationId xmlns:a16="http://schemas.microsoft.com/office/drawing/2014/main" id="{2C1571CC-0F7B-F2C6-5EF9-0937627231A9}"/>
-              </a:ext>
-            </a:extLst>
-          </p:cNvPr>
-          <p:cNvSpPr>
-            <a:spLocks noGrp="1"/>
-          </p:cNvSpPr>
-          <p:nvPr>
-            <p:ph idx="1"/>
-          </p:nvPr>
-        </p:nvSpPr>
-        <p:spPr/>
-        <p:txBody>
-          <a:bodyPr/>
-          <a:lstStyle/>
-          <a:p>
-            <a:r>
-              <a:rPr lang="nl-NL" dirty="0"/>
-              <a:t>Een van de 5 verplichte opdrachten</a:t>
-            </a:r>
-          </a:p>
-        </p:txBody>
-      </p:sp>
-    </p:spTree>
-    <p:extLst>
-      <p:ext uri="{BB962C8B-B14F-4D97-AF65-F5344CB8AC3E}">
-        <p14:creationId xmlns:p14="http://schemas.microsoft.com/office/powerpoint/2010/main" val="4079701516"/>
-      </p:ext>
-    </p:extLst>
-  </p:cSld>
-  <p:clrMapOvr>
-    <a:masterClrMapping/>
-  </p:clrMapOvr>
-</p:sld>
-</file>
-
-<file path=ppt/slides/slide32.xml><?xml version="1.0" encoding="utf-8"?>
-<p:sld xmlns:a="http://schemas.openxmlformats.org/drawingml/2006/main" xmlns:r="http://schemas.openxmlformats.org/officeDocument/2006/relationships" xmlns:p="http://schemas.openxmlformats.org/presentationml/2006/main">
-  <p:cSld>
-    <p:spTree>
-      <p:nvGrpSpPr>
-        <p:cNvPr id="1" name="">
-          <a:extLst>
-            <a:ext uri="{FF2B5EF4-FFF2-40B4-BE49-F238E27FC236}">
-              <a16:creationId xmlns:a16="http://schemas.microsoft.com/office/drawing/2014/main" id="{6FB90BF2-1E61-4A79-FC59-69F557F9BC78}"/>
-            </a:ext>
-          </a:extLst>
-        </p:cNvPr>
-        <p:cNvGrpSpPr/>
-        <p:nvPr/>
-      </p:nvGrpSpPr>
-      <p:grpSpPr>
-        <a:xfrm>
-          <a:off x="0" y="0"/>
-          <a:ext cx="0" cy="0"/>
-          <a:chOff x="0" y="0"/>
-          <a:chExt cx="0" cy="0"/>
-        </a:xfrm>
-      </p:grpSpPr>
-      <p:sp>
-        <p:nvSpPr>
-          <p:cNvPr id="6" name="Titel 5">
-            <a:extLst>
-              <a:ext uri="{FF2B5EF4-FFF2-40B4-BE49-F238E27FC236}">
-                <a16:creationId xmlns:a16="http://schemas.microsoft.com/office/drawing/2014/main" id="{982526CF-5B00-8744-72E4-5E2EA3C97E24}"/>
-              </a:ext>
-            </a:extLst>
-          </p:cNvPr>
-          <p:cNvSpPr>
-            <a:spLocks noGrp="1"/>
-          </p:cNvSpPr>
-          <p:nvPr>
-            <p:ph type="ctrTitle"/>
-          </p:nvPr>
-        </p:nvSpPr>
-        <p:spPr/>
-        <p:txBody>
-          <a:bodyPr/>
-          <a:lstStyle/>
-          <a:p>
-            <a:r>
-              <a:rPr lang="nl-NL" dirty="0"/>
-              <a:t>Graag even inloggen</a:t>
-            </a:r>
-          </a:p>
-        </p:txBody>
-      </p:sp>
-      <p:sp>
-        <p:nvSpPr>
-          <p:cNvPr id="7" name="Ondertitel 6">
-            <a:extLst>
-              <a:ext uri="{FF2B5EF4-FFF2-40B4-BE49-F238E27FC236}">
-                <a16:creationId xmlns:a16="http://schemas.microsoft.com/office/drawing/2014/main" id="{16989F38-D39A-1CF5-9908-835935B9C592}"/>
-              </a:ext>
-            </a:extLst>
-          </p:cNvPr>
-          <p:cNvSpPr>
-            <a:spLocks noGrp="1"/>
-          </p:cNvSpPr>
-          <p:nvPr>
-            <p:ph type="subTitle" idx="1"/>
-          </p:nvPr>
-        </p:nvSpPr>
-        <p:spPr/>
-        <p:txBody>
-          <a:bodyPr/>
-          <a:lstStyle/>
-          <a:p>
-            <a:endParaRPr lang="nl-NL"/>
-          </a:p>
-        </p:txBody>
-      </p:sp>
-      <p:pic>
-        <p:nvPicPr>
-          <p:cNvPr id="2" name="Graphic 1" descr="Vergrendelen met effen opvulling">
-            <a:extLst>
-              <a:ext uri="{FF2B5EF4-FFF2-40B4-BE49-F238E27FC236}">
-                <a16:creationId xmlns:a16="http://schemas.microsoft.com/office/drawing/2014/main" id="{96221F13-9FA2-CFCC-9BE1-5D76577041DE}"/>
-              </a:ext>
-            </a:extLst>
-          </p:cNvPr>
-          <p:cNvPicPr>
-            <a:picLocks noChangeAspect="1"/>
-          </p:cNvPicPr>
-          <p:nvPr/>
-        </p:nvPicPr>
-        <p:blipFill>
-          <a:blip r:embed="rId2">
-            <a:extLst>
-              <a:ext uri="{96DAC541-7B7A-43D3-8B79-37D633B846F1}">
-                <asvg:svgBlip xmlns:asvg="http://schemas.microsoft.com/office/drawing/2016/SVG/main" r:embed="rId3"/>
-              </a:ext>
-            </a:extLst>
-          </a:blip>
-          <a:stretch>
-            <a:fillRect/>
-          </a:stretch>
-        </p:blipFill>
-        <p:spPr>
-          <a:xfrm>
-            <a:off x="8194622" y="2630191"/>
-            <a:ext cx="2808157" cy="2808157"/>
-          </a:xfrm>
-          <a:prstGeom prst="rect">
-            <a:avLst/>
-          </a:prstGeom>
-        </p:spPr>
-      </p:pic>
-    </p:spTree>
-    <p:extLst>
-      <p:ext uri="{BB962C8B-B14F-4D97-AF65-F5344CB8AC3E}">
-        <p14:creationId xmlns:p14="http://schemas.microsoft.com/office/powerpoint/2010/main" val="1482145982"/>
-      </p:ext>
-    </p:extLst>
-  </p:cSld>
-  <p:clrMapOvr>
-    <a:masterClrMapping/>
-  </p:clrMapOvr>
-</p:sld>
-</file>
-
-<file path=ppt/slides/slide33.xml><?xml version="1.0" encoding="utf-8"?>
-<p:sld xmlns:a="http://schemas.openxmlformats.org/drawingml/2006/main" xmlns:r="http://schemas.openxmlformats.org/officeDocument/2006/relationships" xmlns:p="http://schemas.openxmlformats.org/presentationml/2006/main">
-  <p:cSld>
-    <p:spTree>
-      <p:nvGrpSpPr>
-        <p:cNvPr id="1" name=""/>
-        <p:cNvGrpSpPr/>
-        <p:nvPr/>
-      </p:nvGrpSpPr>
-      <p:grpSpPr>
-        <a:xfrm>
-          <a:off x="0" y="0"/>
-          <a:ext cx="0" cy="0"/>
-          <a:chOff x="0" y="0"/>
-          <a:chExt cx="0" cy="0"/>
-        </a:xfrm>
-      </p:grpSpPr>
-      <p:sp>
-        <p:nvSpPr>
-          <p:cNvPr id="2" name="Titel 1">
-            <a:extLst>
-              <a:ext uri="{FF2B5EF4-FFF2-40B4-BE49-F238E27FC236}">
-                <a16:creationId xmlns:a16="http://schemas.microsoft.com/office/drawing/2014/main" id="{224DAFD4-82F5-AA2F-1497-750E48DBA962}"/>
-              </a:ext>
-            </a:extLst>
-          </p:cNvPr>
-          <p:cNvSpPr>
-            <a:spLocks noGrp="1"/>
-          </p:cNvSpPr>
-          <p:nvPr>
-            <p:ph type="ctrTitle"/>
-          </p:nvPr>
-        </p:nvSpPr>
-        <p:spPr/>
-        <p:txBody>
-          <a:bodyPr/>
-          <a:lstStyle/>
-          <a:p>
-            <a:r>
-              <a:rPr lang="nl-NL" dirty="0"/>
-              <a:t>Zijn jullie het al zat om in te loggen?</a:t>
-            </a:r>
-          </a:p>
-        </p:txBody>
-      </p:sp>
-      <p:sp>
-        <p:nvSpPr>
-          <p:cNvPr id="4" name="Ondertitel 3">
-            <a:extLst>
-              <a:ext uri="{FF2B5EF4-FFF2-40B4-BE49-F238E27FC236}">
-                <a16:creationId xmlns:a16="http://schemas.microsoft.com/office/drawing/2014/main" id="{392451CC-C497-5B17-42CF-B92971844C8C}"/>
-              </a:ext>
-            </a:extLst>
-          </p:cNvPr>
-          <p:cNvSpPr>
-            <a:spLocks noGrp="1"/>
-          </p:cNvSpPr>
-          <p:nvPr>
-            <p:ph type="subTitle" idx="1"/>
-          </p:nvPr>
-        </p:nvSpPr>
-        <p:spPr/>
-        <p:txBody>
-          <a:bodyPr/>
-          <a:lstStyle/>
-          <a:p>
-            <a:endParaRPr lang="nl-NL"/>
-          </a:p>
-        </p:txBody>
-      </p:sp>
-    </p:spTree>
-    <p:extLst>
-      <p:ext uri="{BB962C8B-B14F-4D97-AF65-F5344CB8AC3E}">
-        <p14:creationId xmlns:p14="http://schemas.microsoft.com/office/powerpoint/2010/main" val="706450574"/>
-      </p:ext>
-    </p:extLst>
-  </p:cSld>
-  <p:clrMapOvr>
-    <a:masterClrMapping/>
-  </p:clrMapOvr>
-</p:sld>
-</file>
-
-<file path=ppt/slides/slide34.xml><?xml version="1.0" encoding="utf-8"?>
-<p:sld xmlns:a="http://schemas.openxmlformats.org/drawingml/2006/main" xmlns:r="http://schemas.openxmlformats.org/officeDocument/2006/relationships" xmlns:p="http://schemas.openxmlformats.org/presentationml/2006/main">
-  <p:cSld>
-    <p:spTree>
-      <p:nvGrpSpPr>
-        <p:cNvPr id="1" name="">
-          <a:extLst>
-            <a:ext uri="{FF2B5EF4-FFF2-40B4-BE49-F238E27FC236}">
-              <a16:creationId xmlns:a16="http://schemas.microsoft.com/office/drawing/2014/main" id="{5433BF78-BBC5-D4A7-DFF0-F5FABD6B7BB6}"/>
-            </a:ext>
-          </a:extLst>
-        </p:cNvPr>
-        <p:cNvGrpSpPr/>
-        <p:nvPr/>
-      </p:nvGrpSpPr>
-      <p:grpSpPr>
-        <a:xfrm>
-          <a:off x="0" y="0"/>
-          <a:ext cx="0" cy="0"/>
-          <a:chOff x="0" y="0"/>
-          <a:chExt cx="0" cy="0"/>
-        </a:xfrm>
-      </p:grpSpPr>
-      <p:sp>
-        <p:nvSpPr>
-          <p:cNvPr id="6" name="Titel 5">
-            <a:extLst>
-              <a:ext uri="{FF2B5EF4-FFF2-40B4-BE49-F238E27FC236}">
-                <a16:creationId xmlns:a16="http://schemas.microsoft.com/office/drawing/2014/main" id="{F68595BD-D51B-1C61-90AA-ED9C1FBAF004}"/>
-              </a:ext>
-            </a:extLst>
-          </p:cNvPr>
-          <p:cNvSpPr>
-            <a:spLocks noGrp="1"/>
-          </p:cNvSpPr>
-          <p:nvPr>
-            <p:ph type="ctrTitle"/>
-          </p:nvPr>
-        </p:nvSpPr>
-        <p:spPr/>
-        <p:txBody>
-          <a:bodyPr/>
-          <a:lstStyle/>
-          <a:p>
-            <a:r>
-              <a:rPr lang="nl-NL" dirty="0"/>
-              <a:t>Graag even inloggen</a:t>
-            </a:r>
-          </a:p>
-        </p:txBody>
-      </p:sp>
-      <p:sp>
-        <p:nvSpPr>
-          <p:cNvPr id="7" name="Ondertitel 6">
-            <a:extLst>
-              <a:ext uri="{FF2B5EF4-FFF2-40B4-BE49-F238E27FC236}">
-                <a16:creationId xmlns:a16="http://schemas.microsoft.com/office/drawing/2014/main" id="{D6818F84-ED5F-516A-4693-B119B8600DF1}"/>
-              </a:ext>
-            </a:extLst>
-          </p:cNvPr>
-          <p:cNvSpPr>
-            <a:spLocks noGrp="1"/>
-          </p:cNvSpPr>
-          <p:nvPr>
-            <p:ph type="subTitle" idx="1"/>
-          </p:nvPr>
-        </p:nvSpPr>
-        <p:spPr/>
-        <p:txBody>
-          <a:bodyPr/>
-          <a:lstStyle/>
-          <a:p>
-            <a:endParaRPr lang="nl-NL"/>
-          </a:p>
-        </p:txBody>
-      </p:sp>
-      <p:pic>
-        <p:nvPicPr>
-          <p:cNvPr id="2" name="Graphic 1" descr="Vergrendelen met effen opvulling">
-            <a:extLst>
-              <a:ext uri="{FF2B5EF4-FFF2-40B4-BE49-F238E27FC236}">
-                <a16:creationId xmlns:a16="http://schemas.microsoft.com/office/drawing/2014/main" id="{FE14B14A-CD4D-DF5C-D848-289DC13106D6}"/>
-              </a:ext>
-            </a:extLst>
-          </p:cNvPr>
-          <p:cNvPicPr>
-            <a:picLocks noChangeAspect="1"/>
-          </p:cNvPicPr>
-          <p:nvPr/>
-        </p:nvPicPr>
-        <p:blipFill>
-          <a:blip r:embed="rId2">
-            <a:extLst>
-              <a:ext uri="{96DAC541-7B7A-43D3-8B79-37D633B846F1}">
-                <asvg:svgBlip xmlns:asvg="http://schemas.microsoft.com/office/drawing/2016/SVG/main" r:embed="rId3"/>
-              </a:ext>
-            </a:extLst>
-          </a:blip>
-          <a:stretch>
-            <a:fillRect/>
-          </a:stretch>
-        </p:blipFill>
-        <p:spPr>
-          <a:xfrm>
-            <a:off x="8194622" y="2630191"/>
-            <a:ext cx="2808157" cy="2808157"/>
-          </a:xfrm>
-          <a:prstGeom prst="rect">
-            <a:avLst/>
-          </a:prstGeom>
-        </p:spPr>
-      </p:pic>
-    </p:spTree>
-    <p:extLst>
-      <p:ext uri="{BB962C8B-B14F-4D97-AF65-F5344CB8AC3E}">
-        <p14:creationId xmlns:p14="http://schemas.microsoft.com/office/powerpoint/2010/main" val="1210087103"/>
-      </p:ext>
-    </p:extLst>
-  </p:cSld>
-  <p:clrMapOvr>
-    <a:masterClrMapping/>
-  </p:clrMapOvr>
-</p:sld>
-</file>
-
-<file path=ppt/slides/slide35.xml><?xml version="1.0" encoding="utf-8"?>
-<p:sld xmlns:a="http://schemas.openxmlformats.org/drawingml/2006/main" xmlns:r="http://schemas.openxmlformats.org/officeDocument/2006/relationships" xmlns:p="http://schemas.openxmlformats.org/presentationml/2006/main">
-  <p:cSld>
-    <p:spTree>
-      <p:nvGrpSpPr>
-        <p:cNvPr id="1" name=""/>
-        <p:cNvGrpSpPr/>
-        <p:nvPr/>
-      </p:nvGrpSpPr>
-      <p:grpSpPr>
-        <a:xfrm>
-          <a:off x="0" y="0"/>
-          <a:ext cx="0" cy="0"/>
-          <a:chOff x="0" y="0"/>
-          <a:chExt cx="0" cy="0"/>
-        </a:xfrm>
-      </p:grpSpPr>
-      <p:sp>
-        <p:nvSpPr>
-          <p:cNvPr id="2" name="Titel 1">
-            <a:extLst>
-              <a:ext uri="{FF2B5EF4-FFF2-40B4-BE49-F238E27FC236}">
-                <a16:creationId xmlns:a16="http://schemas.microsoft.com/office/drawing/2014/main" id="{50FCEC88-3D46-F402-7693-C4F510DB402F}"/>
-              </a:ext>
-            </a:extLst>
-          </p:cNvPr>
-          <p:cNvSpPr>
-            <a:spLocks noGrp="1"/>
-          </p:cNvSpPr>
-          <p:nvPr>
-            <p:ph type="title"/>
-          </p:nvPr>
-        </p:nvSpPr>
-        <p:spPr/>
-        <p:txBody>
-          <a:bodyPr/>
-          <a:lstStyle/>
-          <a:p>
-            <a:endParaRPr lang="nl-NL" dirty="0"/>
-          </a:p>
-        </p:txBody>
-      </p:sp>
-      <p:sp>
-        <p:nvSpPr>
-          <p:cNvPr id="3" name="Tijdelijke aanduiding voor inhoud 2">
-            <a:extLst>
-              <a:ext uri="{FF2B5EF4-FFF2-40B4-BE49-F238E27FC236}">
-                <a16:creationId xmlns:a16="http://schemas.microsoft.com/office/drawing/2014/main" id="{2826A35B-3FEA-46C1-6448-941478EAA77F}"/>
-              </a:ext>
-            </a:extLst>
-          </p:cNvPr>
-          <p:cNvSpPr>
-            <a:spLocks noGrp="1"/>
-          </p:cNvSpPr>
-          <p:nvPr>
-            <p:ph idx="1"/>
-          </p:nvPr>
-        </p:nvSpPr>
-        <p:spPr>
-          <a:xfrm>
-            <a:off x="2663420" y="1825625"/>
-            <a:ext cx="8690379" cy="3872442"/>
-          </a:xfrm>
-        </p:spPr>
-        <p:txBody>
-          <a:bodyPr/>
-          <a:lstStyle/>
-          <a:p>
-            <a:r>
-              <a:rPr lang="nl-NL" dirty="0"/>
-              <a:t>JSON Web tokens, zijn tokens die bewaard worden op een lokale browser.</a:t>
-            </a:r>
-          </a:p>
-          <a:p>
-            <a:r>
-              <a:rPr lang="nl-NL" dirty="0"/>
-              <a:t>Deze tokens voorkomen dat inloggen niet consistent nodig is voor iedere actie.</a:t>
-            </a:r>
-          </a:p>
-          <a:p>
-            <a:r>
-              <a:rPr lang="nl-NL" dirty="0"/>
-              <a:t>Vooral bedoeld voor web development maar kan ook gebruikt worden voor reguliere applicaties</a:t>
-            </a:r>
-          </a:p>
-          <a:p>
-            <a:r>
-              <a:rPr lang="nl-NL" dirty="0"/>
-              <a:t>Wordt universeel gebruikt en is makkelijk terug te zoeken in een browser, het is een type Cookie</a:t>
-            </a:r>
-          </a:p>
-          <a:p>
-            <a:endParaRPr lang="nl-NL" dirty="0"/>
-          </a:p>
-        </p:txBody>
-      </p:sp>
-      <p:pic>
-        <p:nvPicPr>
-          <p:cNvPr id="2050" name="Picture 2" descr="JSON Web Token — Explanation. JWT is used for authentication and… | by  Somesh | Medium">
-            <a:extLst>
-              <a:ext uri="{FF2B5EF4-FFF2-40B4-BE49-F238E27FC236}">
-                <a16:creationId xmlns:a16="http://schemas.microsoft.com/office/drawing/2014/main" id="{4D1E81A4-FB44-7886-D593-6ABAA71A2627}"/>
-              </a:ext>
-            </a:extLst>
-          </p:cNvPr>
-          <p:cNvPicPr>
-            <a:picLocks noChangeAspect="1" noChangeArrowheads="1"/>
-          </p:cNvPicPr>
-          <p:nvPr/>
-        </p:nvPicPr>
-        <p:blipFill>
-          <a:blip r:embed="rId2">
-            <a:extLst>
-              <a:ext uri="{28A0092B-C50C-407E-A947-70E740481C1C}">
-                <a14:useLocalDpi xmlns:a14="http://schemas.microsoft.com/office/drawing/2010/main" val="0"/>
-              </a:ext>
-            </a:extLst>
-          </a:blip>
-          <a:srcRect/>
-          <a:stretch>
-            <a:fillRect/>
-          </a:stretch>
-        </p:blipFill>
-        <p:spPr bwMode="auto">
-          <a:xfrm>
-            <a:off x="505497" y="352265"/>
-            <a:ext cx="4529840" cy="1327910"/>
-          </a:xfrm>
-          <a:prstGeom prst="rect">
-            <a:avLst/>
-          </a:prstGeom>
-          <a:noFill/>
-          <a:extLst>
-            <a:ext uri="{909E8E84-426E-40DD-AFC4-6F175D3DCCD1}">
-              <a14:hiddenFill xmlns:a14="http://schemas.microsoft.com/office/drawing/2010/main">
-                <a:solidFill>
-                  <a:srgbClr val="FFFFFF"/>
-                </a:solidFill>
-              </a14:hiddenFill>
-            </a:ext>
-          </a:extLst>
-        </p:spPr>
-      </p:pic>
-    </p:spTree>
-    <p:extLst>
-      <p:ext uri="{BB962C8B-B14F-4D97-AF65-F5344CB8AC3E}">
-        <p14:creationId xmlns:p14="http://schemas.microsoft.com/office/powerpoint/2010/main" val="1756895851"/>
-      </p:ext>
-    </p:extLst>
-  </p:cSld>
-  <p:clrMapOvr>
-    <a:masterClrMapping/>
-  </p:clrMapOvr>
-</p:sld>
-</file>
-
-<file path=ppt/slides/slide36.xml><?xml version="1.0" encoding="utf-8"?>
-<p:sld xmlns:a="http://schemas.openxmlformats.org/drawingml/2006/main" xmlns:r="http://schemas.openxmlformats.org/officeDocument/2006/relationships" xmlns:p="http://schemas.openxmlformats.org/presentationml/2006/main">
-  <p:cSld>
-    <p:spTree>
-      <p:nvGrpSpPr>
-        <p:cNvPr id="1" name=""/>
-        <p:cNvGrpSpPr/>
-        <p:nvPr/>
-      </p:nvGrpSpPr>
-      <p:grpSpPr>
-        <a:xfrm>
-          <a:off x="0" y="0"/>
-          <a:ext cx="0" cy="0"/>
-          <a:chOff x="0" y="0"/>
-          <a:chExt cx="0" cy="0"/>
-        </a:xfrm>
-      </p:grpSpPr>
-      <p:sp>
-        <p:nvSpPr>
-          <p:cNvPr id="2" name="Titel 1">
-            <a:extLst>
-              <a:ext uri="{FF2B5EF4-FFF2-40B4-BE49-F238E27FC236}">
-                <a16:creationId xmlns:a16="http://schemas.microsoft.com/office/drawing/2014/main" id="{A909D43B-085C-94D0-3743-F763D559C2BD}"/>
-              </a:ext>
-            </a:extLst>
-          </p:cNvPr>
-          <p:cNvSpPr>
-            <a:spLocks noGrp="1"/>
-          </p:cNvSpPr>
-          <p:nvPr>
-            <p:ph type="title"/>
-          </p:nvPr>
-        </p:nvSpPr>
-        <p:spPr/>
-        <p:txBody>
-          <a:bodyPr/>
-          <a:lstStyle/>
-          <a:p>
-            <a:r>
-              <a:rPr lang="nl-NL" dirty="0"/>
-              <a:t>JWT - gebruik</a:t>
-            </a:r>
-          </a:p>
-        </p:txBody>
-      </p:sp>
-      <p:sp>
-        <p:nvSpPr>
-          <p:cNvPr id="3" name="Tijdelijke aanduiding voor inhoud 2">
-            <a:extLst>
-              <a:ext uri="{FF2B5EF4-FFF2-40B4-BE49-F238E27FC236}">
-                <a16:creationId xmlns:a16="http://schemas.microsoft.com/office/drawing/2014/main" id="{51901959-0508-93D2-E083-6980228B7AF7}"/>
-              </a:ext>
-            </a:extLst>
-          </p:cNvPr>
-          <p:cNvSpPr>
-            <a:spLocks noGrp="1"/>
-          </p:cNvSpPr>
-          <p:nvPr>
-            <p:ph idx="1"/>
-          </p:nvPr>
-        </p:nvSpPr>
-        <p:spPr/>
-        <p:txBody>
-          <a:bodyPr/>
-          <a:lstStyle/>
-          <a:p>
-            <a:r>
-              <a:rPr lang="nl-NL" dirty="0"/>
-              <a:t>De gebruiker logt in.</a:t>
-            </a:r>
-          </a:p>
-          <a:p>
-            <a:r>
-              <a:rPr lang="nl-NL" dirty="0"/>
-              <a:t>De gegevens worden gecontroleerd</a:t>
-            </a:r>
-          </a:p>
-          <a:p>
-            <a:r>
-              <a:rPr lang="nl-NL" dirty="0"/>
-              <a:t>De server maakt een token aan die gekoppeld is aan een gebruiker en tijdsframe. (Soms ook IP bij hoge beveiliging)</a:t>
-            </a:r>
-          </a:p>
-          <a:p>
-            <a:r>
-              <a:rPr lang="nl-NL" dirty="0"/>
-              <a:t>De gebruiker kan nu doen wat hij/zij wilt tot de gebruiker uitlogt of tot de tijd op is.</a:t>
-            </a:r>
-          </a:p>
-        </p:txBody>
-      </p:sp>
-      <p:pic>
-        <p:nvPicPr>
-          <p:cNvPr id="4098" name="Picture 2" descr="MILK CHOCOLATE CHIP COOKIE XL">
-            <a:extLst>
-              <a:ext uri="{FF2B5EF4-FFF2-40B4-BE49-F238E27FC236}">
-                <a16:creationId xmlns:a16="http://schemas.microsoft.com/office/drawing/2014/main" id="{85302E53-A903-F88A-0A2F-94EF1BBC74A9}"/>
-              </a:ext>
-            </a:extLst>
-          </p:cNvPr>
-          <p:cNvPicPr>
-            <a:picLocks noChangeAspect="1" noChangeArrowheads="1"/>
-          </p:cNvPicPr>
-          <p:nvPr/>
-        </p:nvPicPr>
-        <p:blipFill>
-          <a:blip r:embed="rId2">
-            <a:extLst>
-              <a:ext uri="{28A0092B-C50C-407E-A947-70E740481C1C}">
-                <a14:useLocalDpi xmlns:a14="http://schemas.microsoft.com/office/drawing/2010/main" val="0"/>
-              </a:ext>
-            </a:extLst>
-          </a:blip>
-          <a:srcRect/>
-          <a:stretch>
-            <a:fillRect/>
-          </a:stretch>
-        </p:blipFill>
-        <p:spPr bwMode="auto">
-          <a:xfrm>
-            <a:off x="10486312" y="39418"/>
-            <a:ext cx="1497074" cy="1497074"/>
-          </a:xfrm>
-          <a:prstGeom prst="rect">
-            <a:avLst/>
-          </a:prstGeom>
-          <a:noFill/>
-          <a:extLst>
-            <a:ext uri="{909E8E84-426E-40DD-AFC4-6F175D3DCCD1}">
-              <a14:hiddenFill xmlns:a14="http://schemas.microsoft.com/office/drawing/2010/main">
-                <a:solidFill>
-                  <a:srgbClr val="FFFFFF"/>
-                </a:solidFill>
-              </a14:hiddenFill>
-            </a:ext>
-          </a:extLst>
-        </p:spPr>
-      </p:pic>
-    </p:spTree>
-    <p:extLst>
-      <p:ext uri="{BB962C8B-B14F-4D97-AF65-F5344CB8AC3E}">
-        <p14:creationId xmlns:p14="http://schemas.microsoft.com/office/powerpoint/2010/main" val="3310567775"/>
-      </p:ext>
-    </p:extLst>
-  </p:cSld>
-  <p:clrMapOvr>
-    <a:masterClrMapping/>
-  </p:clrMapOvr>
-</p:sld>
-</file>
-
-<file path=ppt/slides/slide37.xml><?xml version="1.0" encoding="utf-8"?>
-<p:sld xmlns:a="http://schemas.openxmlformats.org/drawingml/2006/main" xmlns:r="http://schemas.openxmlformats.org/officeDocument/2006/relationships" xmlns:p="http://schemas.openxmlformats.org/presentationml/2006/main">
-  <p:cSld>
-    <p:spTree>
-      <p:nvGrpSpPr>
-        <p:cNvPr id="1" name="">
-          <a:extLst>
-            <a:ext uri="{FF2B5EF4-FFF2-40B4-BE49-F238E27FC236}">
-              <a16:creationId xmlns:a16="http://schemas.microsoft.com/office/drawing/2014/main" id="{38A174A3-A094-CDC8-71E9-4795D35A155C}"/>
-            </a:ext>
-          </a:extLst>
-        </p:cNvPr>
-        <p:cNvGrpSpPr/>
-        <p:nvPr/>
-      </p:nvGrpSpPr>
-      <p:grpSpPr>
-        <a:xfrm>
-          <a:off x="0" y="0"/>
-          <a:ext cx="0" cy="0"/>
-          <a:chOff x="0" y="0"/>
-          <a:chExt cx="0" cy="0"/>
-        </a:xfrm>
-      </p:grpSpPr>
-      <p:sp>
-        <p:nvSpPr>
-          <p:cNvPr id="2" name="Titel 1">
-            <a:extLst>
-              <a:ext uri="{FF2B5EF4-FFF2-40B4-BE49-F238E27FC236}">
-                <a16:creationId xmlns:a16="http://schemas.microsoft.com/office/drawing/2014/main" id="{20D44702-6029-CE5F-93CA-1840BCACA1C0}"/>
-              </a:ext>
-            </a:extLst>
-          </p:cNvPr>
-          <p:cNvSpPr>
-            <a:spLocks noGrp="1"/>
-          </p:cNvSpPr>
-          <p:nvPr>
-            <p:ph type="title"/>
-          </p:nvPr>
-        </p:nvSpPr>
-        <p:spPr/>
-        <p:txBody>
-          <a:bodyPr/>
-          <a:lstStyle/>
-          <a:p>
-            <a:r>
-              <a:rPr lang="nl-NL" dirty="0"/>
-              <a:t>JWT – gebruik in code</a:t>
-            </a:r>
-          </a:p>
-        </p:txBody>
-      </p:sp>
-      <p:sp>
-        <p:nvSpPr>
-          <p:cNvPr id="3" name="Tijdelijke aanduiding voor inhoud 2">
-            <a:extLst>
-              <a:ext uri="{FF2B5EF4-FFF2-40B4-BE49-F238E27FC236}">
-                <a16:creationId xmlns:a16="http://schemas.microsoft.com/office/drawing/2014/main" id="{44BC2A6B-5654-A801-F9F0-2F2EA86CA16C}"/>
-              </a:ext>
-            </a:extLst>
-          </p:cNvPr>
-          <p:cNvSpPr>
-            <a:spLocks noGrp="1"/>
-          </p:cNvSpPr>
-          <p:nvPr>
-            <p:ph idx="1"/>
-          </p:nvPr>
-        </p:nvSpPr>
-        <p:spPr/>
-        <p:txBody>
-          <a:bodyPr/>
-          <a:lstStyle/>
-          <a:p>
-            <a:r>
-              <a:rPr lang="nl-NL" dirty="0"/>
-              <a:t>(Bijna) iedere taal heeft een package waarmee je JWT kan genereren, vereist vaak een </a:t>
-            </a:r>
-            <a:r>
-              <a:rPr lang="nl-NL" dirty="0" err="1"/>
-              <a:t>install</a:t>
-            </a:r>
-            <a:r>
-              <a:rPr lang="nl-NL" dirty="0"/>
-              <a:t>.</a:t>
-            </a:r>
-          </a:p>
-          <a:p>
-            <a:r>
-              <a:rPr lang="nl-NL" dirty="0"/>
-              <a:t>Je maakt een private key van random letters en cijfers. </a:t>
-            </a:r>
-          </a:p>
-          <a:p>
-            <a:r>
-              <a:rPr lang="nl-NL" dirty="0"/>
-              <a:t>Laat JWT het generen</a:t>
-            </a:r>
-          </a:p>
-          <a:p>
-            <a:r>
-              <a:rPr lang="nl-NL" dirty="0"/>
-              <a:t>Stuurt het op naar de gebruiker, deze slaat het op in de browser</a:t>
-            </a:r>
-          </a:p>
-          <a:p>
-            <a:r>
-              <a:rPr lang="nl-NL" dirty="0"/>
-              <a:t>De gebruiker stuurt met iedere actie de JWT mee.</a:t>
-            </a:r>
-          </a:p>
-          <a:p>
-            <a:r>
-              <a:rPr lang="nl-NL" dirty="0"/>
-              <a:t>JWT controleert zichzelf of de actie nog kan en of de juiste persoon acties uitvoert.</a:t>
-            </a:r>
-          </a:p>
-        </p:txBody>
-      </p:sp>
-      <p:pic>
-        <p:nvPicPr>
-          <p:cNvPr id="4098" name="Picture 2" descr="MILK CHOCOLATE CHIP COOKIE XL">
-            <a:extLst>
-              <a:ext uri="{FF2B5EF4-FFF2-40B4-BE49-F238E27FC236}">
-                <a16:creationId xmlns:a16="http://schemas.microsoft.com/office/drawing/2014/main" id="{377C670B-908B-9CC4-9449-299F4A718167}"/>
-              </a:ext>
-            </a:extLst>
-          </p:cNvPr>
-          <p:cNvPicPr>
-            <a:picLocks noChangeAspect="1" noChangeArrowheads="1"/>
-          </p:cNvPicPr>
-          <p:nvPr/>
-        </p:nvPicPr>
-        <p:blipFill>
-          <a:blip r:embed="rId2">
-            <a:extLst>
-              <a:ext uri="{28A0092B-C50C-407E-A947-70E740481C1C}">
-                <a14:useLocalDpi xmlns:a14="http://schemas.microsoft.com/office/drawing/2010/main" val="0"/>
-              </a:ext>
-            </a:extLst>
-          </a:blip>
-          <a:srcRect/>
-          <a:stretch>
-            <a:fillRect/>
-          </a:stretch>
-        </p:blipFill>
-        <p:spPr bwMode="auto">
-          <a:xfrm>
-            <a:off x="10486312" y="39418"/>
-            <a:ext cx="1497074" cy="1497074"/>
-          </a:xfrm>
-          <a:prstGeom prst="rect">
-            <a:avLst/>
-          </a:prstGeom>
-          <a:noFill/>
-          <a:extLst>
-            <a:ext uri="{909E8E84-426E-40DD-AFC4-6F175D3DCCD1}">
-              <a14:hiddenFill xmlns:a14="http://schemas.microsoft.com/office/drawing/2010/main">
-                <a:solidFill>
-                  <a:srgbClr val="FFFFFF"/>
-                </a:solidFill>
-              </a14:hiddenFill>
-            </a:ext>
-          </a:extLst>
-        </p:spPr>
-      </p:pic>
-    </p:spTree>
-    <p:extLst>
-      <p:ext uri="{BB962C8B-B14F-4D97-AF65-F5344CB8AC3E}">
-        <p14:creationId xmlns:p14="http://schemas.microsoft.com/office/powerpoint/2010/main" val="592439833"/>
-      </p:ext>
-    </p:extLst>
-  </p:cSld>
-  <p:clrMapOvr>
-    <a:masterClrMapping/>
-  </p:clrMapOvr>
-</p:sld>
-</file>
-
-<file path=ppt/slides/slide38.xml><?xml version="1.0" encoding="utf-8"?>
-<p:sld xmlns:a="http://schemas.openxmlformats.org/drawingml/2006/main" xmlns:r="http://schemas.openxmlformats.org/officeDocument/2006/relationships" xmlns:p="http://schemas.openxmlformats.org/presentationml/2006/main">
-  <p:cSld>
-    <p:spTree>
-      <p:nvGrpSpPr>
-        <p:cNvPr id="1" name=""/>
-        <p:cNvGrpSpPr/>
-        <p:nvPr/>
-      </p:nvGrpSpPr>
-      <p:grpSpPr>
-        <a:xfrm>
-          <a:off x="0" y="0"/>
-          <a:ext cx="0" cy="0"/>
-          <a:chOff x="0" y="0"/>
-          <a:chExt cx="0" cy="0"/>
-        </a:xfrm>
-      </p:grpSpPr>
-      <p:sp>
-        <p:nvSpPr>
-          <p:cNvPr id="2" name="Titel 1">
-            <a:extLst>
-              <a:ext uri="{FF2B5EF4-FFF2-40B4-BE49-F238E27FC236}">
-                <a16:creationId xmlns:a16="http://schemas.microsoft.com/office/drawing/2014/main" id="{AA9D8D61-0B66-4C27-EF35-7FD222DE7F05}"/>
-              </a:ext>
-            </a:extLst>
-          </p:cNvPr>
-          <p:cNvSpPr>
-            <a:spLocks noGrp="1"/>
-          </p:cNvSpPr>
-          <p:nvPr>
-            <p:ph type="title"/>
-          </p:nvPr>
-        </p:nvSpPr>
-        <p:spPr/>
-        <p:txBody>
-          <a:bodyPr/>
-          <a:lstStyle/>
-          <a:p>
-            <a:r>
-              <a:rPr lang="nl-NL" dirty="0"/>
-              <a:t>Opdrachten: Database </a:t>
-            </a:r>
-            <a:r>
-              <a:rPr lang="nl-NL" dirty="0" err="1"/>
-              <a:t>injections</a:t>
-            </a:r>
-            <a:r>
-              <a:rPr lang="nl-NL" dirty="0"/>
-              <a:t> &amp; JWT</a:t>
-            </a:r>
-          </a:p>
-        </p:txBody>
-      </p:sp>
-      <p:sp>
-        <p:nvSpPr>
-          <p:cNvPr id="3" name="Tijdelijke aanduiding voor inhoud 2">
-            <a:extLst>
-              <a:ext uri="{FF2B5EF4-FFF2-40B4-BE49-F238E27FC236}">
-                <a16:creationId xmlns:a16="http://schemas.microsoft.com/office/drawing/2014/main" id="{73D65B2C-0B29-6837-1A38-EBF4B3F9DA5A}"/>
-              </a:ext>
-            </a:extLst>
-          </p:cNvPr>
-          <p:cNvSpPr>
-            <a:spLocks noGrp="1"/>
-          </p:cNvSpPr>
-          <p:nvPr>
-            <p:ph idx="1"/>
-          </p:nvPr>
-        </p:nvSpPr>
-        <p:spPr/>
-        <p:txBody>
-          <a:bodyPr/>
-          <a:lstStyle/>
-          <a:p>
-            <a:r>
-              <a:rPr lang="nl-NL" dirty="0"/>
-              <a:t>Twee opdrachten deze week:</a:t>
-            </a:r>
-          </a:p>
-          <a:p>
-            <a:pPr lvl="1"/>
-            <a:r>
-              <a:rPr lang="nl-NL" dirty="0"/>
-              <a:t>Database </a:t>
-            </a:r>
-            <a:r>
-              <a:rPr lang="nl-NL" dirty="0" err="1"/>
-              <a:t>injection</a:t>
-            </a:r>
-            <a:r>
-              <a:rPr lang="nl-NL" dirty="0"/>
-              <a:t> oefening met de mogelijkheid om een database te manipuleren op wijze die niet bedoeld zijn. </a:t>
-            </a:r>
-          </a:p>
-          <a:p>
-            <a:pPr lvl="1"/>
-            <a:endParaRPr lang="nl-NL" dirty="0"/>
-          </a:p>
-          <a:p>
-            <a:pPr lvl="1"/>
-            <a:r>
-              <a:rPr lang="nl-NL" dirty="0"/>
-              <a:t>JWT oefening waarmee je een tijdelijke token kan maken en gebruik ervan maken. </a:t>
-            </a:r>
-          </a:p>
-        </p:txBody>
-      </p:sp>
-    </p:spTree>
-    <p:extLst>
-      <p:ext uri="{BB962C8B-B14F-4D97-AF65-F5344CB8AC3E}">
-        <p14:creationId xmlns:p14="http://schemas.microsoft.com/office/powerpoint/2010/main" val="2464847785"/>
-      </p:ext>
-    </p:extLst>
-  </p:cSld>
-  <p:clrMapOvr>
-    <a:masterClrMapping/>
-  </p:clrMapOvr>
-</p:sld>
-</file>
-
-<file path=ppt/slides/slide39.xml><?xml version="1.0" encoding="utf-8"?>
-<p:sld xmlns:a="http://schemas.openxmlformats.org/drawingml/2006/main" xmlns:r="http://schemas.openxmlformats.org/officeDocument/2006/relationships" xmlns:p="http://schemas.openxmlformats.org/presentationml/2006/main">
-  <p:cSld>
-    <p:spTree>
-      <p:nvGrpSpPr>
-        <p:cNvPr id="1" name=""/>
-        <p:cNvGrpSpPr/>
-        <p:nvPr/>
-      </p:nvGrpSpPr>
-      <p:grpSpPr>
-        <a:xfrm>
-          <a:off x="0" y="0"/>
-          <a:ext cx="0" cy="0"/>
-          <a:chOff x="0" y="0"/>
-          <a:chExt cx="0" cy="0"/>
-        </a:xfrm>
-      </p:grpSpPr>
-      <p:sp>
-        <p:nvSpPr>
-          <p:cNvPr id="2" name="Titel 1">
-            <a:extLst>
-              <a:ext uri="{FF2B5EF4-FFF2-40B4-BE49-F238E27FC236}">
-                <a16:creationId xmlns:a16="http://schemas.microsoft.com/office/drawing/2014/main" id="{B11A3F00-D22C-8C45-2591-74E8FD01CE37}"/>
-              </a:ext>
-            </a:extLst>
-          </p:cNvPr>
-          <p:cNvSpPr>
-            <a:spLocks noGrp="1"/>
-          </p:cNvSpPr>
-          <p:nvPr>
-            <p:ph type="title"/>
-          </p:nvPr>
-        </p:nvSpPr>
-        <p:spPr>
-          <a:xfrm>
-            <a:off x="838200" y="365125"/>
-            <a:ext cx="10515600" cy="1325563"/>
-          </a:xfrm>
-        </p:spPr>
-        <p:txBody>
-          <a:bodyPr anchor="ctr">
-            <a:normAutofit/>
-          </a:bodyPr>
-          <a:lstStyle/>
-          <a:p>
-            <a:r>
-              <a:rPr lang="nl-NL" dirty="0"/>
-              <a:t>Volgende week</a:t>
-            </a:r>
-          </a:p>
-        </p:txBody>
-      </p:sp>
-      <p:sp>
-        <p:nvSpPr>
-          <p:cNvPr id="3" name="Tijdelijke aanduiding voor inhoud 2">
-            <a:extLst>
-              <a:ext uri="{FF2B5EF4-FFF2-40B4-BE49-F238E27FC236}">
-                <a16:creationId xmlns:a16="http://schemas.microsoft.com/office/drawing/2014/main" id="{A186008C-654E-6F3B-AA1A-BDA418F9A75C}"/>
-              </a:ext>
-            </a:extLst>
-          </p:cNvPr>
-          <p:cNvSpPr>
-            <a:spLocks noGrp="1"/>
-          </p:cNvSpPr>
-          <p:nvPr>
-            <p:ph sz="half" idx="1"/>
-          </p:nvPr>
-        </p:nvSpPr>
-        <p:spPr>
-          <a:xfrm>
-            <a:off x="838200" y="1825625"/>
-            <a:ext cx="5181600" cy="4018584"/>
-          </a:xfrm>
-        </p:spPr>
-        <p:txBody>
-          <a:bodyPr>
-            <a:normAutofit/>
-          </a:bodyPr>
-          <a:lstStyle/>
-          <a:p>
-            <a:r>
-              <a:rPr lang="nl-NL" dirty="0"/>
-              <a:t>Netwerken</a:t>
-            </a:r>
-          </a:p>
-          <a:p>
-            <a:pPr lvl="1"/>
-            <a:r>
-              <a:rPr lang="nl-NL" sz="2800"/>
-              <a:t>Afluisteren</a:t>
-            </a:r>
-          </a:p>
-          <a:p>
-            <a:pPr lvl="1"/>
-            <a:r>
-              <a:rPr lang="nl-NL" sz="2800"/>
-              <a:t>Beschermen</a:t>
-            </a:r>
-          </a:p>
-          <a:p>
-            <a:pPr lvl="1"/>
-            <a:r>
-              <a:rPr lang="nl-NL" sz="2800"/>
-              <a:t>VPN</a:t>
-            </a:r>
-          </a:p>
-          <a:p>
-            <a:r>
-              <a:rPr lang="nl-NL" dirty="0"/>
-              <a:t>Man in de </a:t>
-            </a:r>
-            <a:r>
-              <a:rPr lang="nl-NL" dirty="0" err="1"/>
-              <a:t>middle</a:t>
-            </a:r>
-            <a:endParaRPr lang="nl-NL" dirty="0"/>
-          </a:p>
-          <a:p>
-            <a:r>
-              <a:rPr lang="nl-NL" dirty="0" err="1"/>
-              <a:t>Wireshark</a:t>
-            </a:r>
-            <a:endParaRPr lang="nl-NL" dirty="0"/>
-          </a:p>
-        </p:txBody>
-      </p:sp>
-      <p:pic>
-        <p:nvPicPr>
-          <p:cNvPr id="5" name="Graphic 4" descr="Verbindingen silhouet">
-            <a:extLst>
-              <a:ext uri="{FF2B5EF4-FFF2-40B4-BE49-F238E27FC236}">
-                <a16:creationId xmlns:a16="http://schemas.microsoft.com/office/drawing/2014/main" id="{6C760D15-C48F-6D52-7C29-70292DD61793}"/>
-              </a:ext>
-            </a:extLst>
-          </p:cNvPr>
-          <p:cNvPicPr>
-            <a:picLocks noChangeAspect="1"/>
-          </p:cNvPicPr>
-          <p:nvPr/>
-        </p:nvPicPr>
-        <p:blipFill>
-          <a:blip r:embed="rId2">
-            <a:extLst>
-              <a:ext uri="{96DAC541-7B7A-43D3-8B79-37D633B846F1}">
-                <asvg:svgBlip xmlns:asvg="http://schemas.microsoft.com/office/drawing/2016/SVG/main" r:embed="rId3"/>
-              </a:ext>
-            </a:extLst>
-          </a:blip>
-          <a:stretch>
-            <a:fillRect/>
-          </a:stretch>
-        </p:blipFill>
-        <p:spPr>
-          <a:xfrm>
-            <a:off x="6753708" y="1825625"/>
-            <a:ext cx="4018584" cy="4018584"/>
-          </a:xfrm>
-          <a:prstGeom prst="rect">
-            <a:avLst/>
-          </a:prstGeom>
-        </p:spPr>
-      </p:pic>
-    </p:spTree>
-    <p:extLst>
-      <p:ext uri="{BB962C8B-B14F-4D97-AF65-F5344CB8AC3E}">
-        <p14:creationId xmlns:p14="http://schemas.microsoft.com/office/powerpoint/2010/main" val="2527215279"/>
-      </p:ext>
-    </p:extLst>
-  </p:cSld>
-  <p:clrMapOvr>
-    <a:masterClrMapping/>
-  </p:clrMapOvr>
-</p:sld>
-</file>
-
 <file path=ppt/slides/slide4.xml><?xml version="1.0" encoding="utf-8"?>
 <p:sld xmlns:a="http://schemas.openxmlformats.org/drawingml/2006/main" xmlns:r="http://schemas.openxmlformats.org/officeDocument/2006/relationships" xmlns:p="http://schemas.openxmlformats.org/presentationml/2006/main">
   <p:cSld>
@@ -9473,15 +7035,15 @@
           <p:cNvPr id="2" name="Titel 1">
             <a:extLst>
               <a:ext uri="{FF2B5EF4-FFF2-40B4-BE49-F238E27FC236}">
-                <a16:creationId xmlns:a16="http://schemas.microsoft.com/office/drawing/2014/main" id="{8D5510F2-2B32-D320-8605-353E1ABB75AA}"/>
-              </a:ext>
-            </a:extLst>
-          </p:cNvPr>
-          <p:cNvSpPr>
-            <a:spLocks noGrp="1"/>
-          </p:cNvSpPr>
-          <p:nvPr>
-            <p:ph type="ctrTitle"/>
+                <a16:creationId xmlns:a16="http://schemas.microsoft.com/office/drawing/2014/main" id="{F1607051-0F3C-18D1-A04F-F432EA764878}"/>
+              </a:ext>
+            </a:extLst>
+          </p:cNvPr>
+          <p:cNvSpPr>
+            <a:spLocks noGrp="1"/>
+          </p:cNvSpPr>
+          <p:nvPr>
+            <p:ph type="title"/>
           </p:nvPr>
         </p:nvSpPr>
         <p:spPr/>
@@ -9491,7 +7053,7 @@
           <a:p>
             <a:r>
               <a:rPr lang="nl-NL" dirty="0"/>
-              <a:t>Inlog gegevens voor deze les zijn</a:t>
+              <a:t>Database security opties</a:t>
             </a:r>
           </a:p>
         </p:txBody>
@@ -9501,15 +7063,15 @@
           <p:cNvPr id="3" name="Tijdelijke aanduiding voor inhoud 2">
             <a:extLst>
               <a:ext uri="{FF2B5EF4-FFF2-40B4-BE49-F238E27FC236}">
-                <a16:creationId xmlns:a16="http://schemas.microsoft.com/office/drawing/2014/main" id="{37AE74EC-2336-CBDD-AE14-3A612A9795DE}"/>
-              </a:ext>
-            </a:extLst>
-          </p:cNvPr>
-          <p:cNvSpPr>
-            <a:spLocks noGrp="1"/>
-          </p:cNvSpPr>
-          <p:nvPr>
-            <p:ph type="subTitle" idx="1"/>
+                <a16:creationId xmlns:a16="http://schemas.microsoft.com/office/drawing/2014/main" id="{E65DC7E6-20F3-149A-4BB4-6A7FD62524AE}"/>
+              </a:ext>
+            </a:extLst>
+          </p:cNvPr>
+          <p:cNvSpPr>
+            <a:spLocks noGrp="1"/>
+          </p:cNvSpPr>
+          <p:nvPr>
+            <p:ph idx="1"/>
           </p:nvPr>
         </p:nvSpPr>
         <p:spPr/>
@@ -9519,13 +7081,37 @@
           <a:p>
             <a:r>
               <a:rPr lang="nl-NL" dirty="0"/>
-              <a:t>Gebruikersnaam: Student</a:t>
-            </a:r>
-          </a:p>
-          <a:p>
-            <a:r>
-              <a:rPr lang="nl-NL" dirty="0"/>
-              <a:t>Wachtwoord: P1zzaParty!</a:t>
+              <a:t>Wachtwoord beveiliging</a:t>
+            </a:r>
+          </a:p>
+          <a:p>
+            <a:r>
+              <a:rPr lang="nl-NL" dirty="0"/>
+              <a:t>Toegang tot specifieke datasets</a:t>
+            </a:r>
+          </a:p>
+          <a:p>
+            <a:r>
+              <a:rPr lang="nl-NL" dirty="0"/>
+              <a:t>Rollen en rechten</a:t>
+            </a:r>
+          </a:p>
+          <a:p>
+            <a:r>
+              <a:rPr lang="nl-NL" dirty="0"/>
+              <a:t>CRUD beveiliging</a:t>
+            </a:r>
+          </a:p>
+          <a:p>
+            <a:r>
+              <a:rPr lang="nl-NL" dirty="0"/>
+              <a:t>Download blokkades</a:t>
+            </a:r>
+          </a:p>
+          <a:p>
+            <a:r>
+              <a:rPr lang="nl-NL" dirty="0"/>
+              <a:t>Monitoring</a:t>
             </a:r>
           </a:p>
         </p:txBody>
@@ -9533,7 +7119,7 @@
     </p:spTree>
     <p:extLst>
       <p:ext uri="{BB962C8B-B14F-4D97-AF65-F5344CB8AC3E}">
-        <p14:creationId xmlns:p14="http://schemas.microsoft.com/office/powerpoint/2010/main" val="514222026"/>
+        <p14:creationId xmlns:p14="http://schemas.microsoft.com/office/powerpoint/2010/main" val="4073276283"/>
       </p:ext>
     </p:extLst>
   </p:cSld>
@@ -9562,18 +7148,18 @@
       </p:grpSpPr>
       <p:sp>
         <p:nvSpPr>
-          <p:cNvPr id="6" name="Titel 5">
-            <a:extLst>
-              <a:ext uri="{FF2B5EF4-FFF2-40B4-BE49-F238E27FC236}">
-                <a16:creationId xmlns:a16="http://schemas.microsoft.com/office/drawing/2014/main" id="{36755E58-7A20-D108-407B-C0B63F604093}"/>
-              </a:ext>
-            </a:extLst>
-          </p:cNvPr>
-          <p:cNvSpPr>
-            <a:spLocks noGrp="1"/>
-          </p:cNvSpPr>
-          <p:nvPr>
-            <p:ph type="ctrTitle"/>
+          <p:cNvPr id="7" name="Titel 6">
+            <a:extLst>
+              <a:ext uri="{FF2B5EF4-FFF2-40B4-BE49-F238E27FC236}">
+                <a16:creationId xmlns:a16="http://schemas.microsoft.com/office/drawing/2014/main" id="{A2F2096A-9AE3-3EB4-2E7F-67C34ECFD46B}"/>
+              </a:ext>
+            </a:extLst>
+          </p:cNvPr>
+          <p:cNvSpPr>
+            <a:spLocks noGrp="1"/>
+          </p:cNvSpPr>
+          <p:nvPr>
+            <p:ph type="title"/>
           </p:nvPr>
         </p:nvSpPr>
         <p:spPr/>
@@ -9583,25 +7169,25 @@
           <a:p>
             <a:r>
               <a:rPr lang="nl-NL" dirty="0"/>
-              <a:t>Graag even inloggen</a:t>
-            </a:r>
-          </a:p>
-        </p:txBody>
-      </p:sp>
-      <p:sp>
-        <p:nvSpPr>
-          <p:cNvPr id="7" name="Ondertitel 6">
-            <a:extLst>
-              <a:ext uri="{FF2B5EF4-FFF2-40B4-BE49-F238E27FC236}">
-                <a16:creationId xmlns:a16="http://schemas.microsoft.com/office/drawing/2014/main" id="{5B59319F-8C85-9EC9-AC92-04C86349B0C6}"/>
-              </a:ext>
-            </a:extLst>
-          </p:cNvPr>
-          <p:cNvSpPr>
-            <a:spLocks noGrp="1"/>
-          </p:cNvSpPr>
-          <p:nvPr>
-            <p:ph type="subTitle" idx="1"/>
+              <a:t>Database security</a:t>
+            </a:r>
+          </a:p>
+        </p:txBody>
+      </p:sp>
+      <p:sp>
+        <p:nvSpPr>
+          <p:cNvPr id="8" name="Tijdelijke aanduiding voor tekst 7">
+            <a:extLst>
+              <a:ext uri="{FF2B5EF4-FFF2-40B4-BE49-F238E27FC236}">
+                <a16:creationId xmlns:a16="http://schemas.microsoft.com/office/drawing/2014/main" id="{E4C2A8AE-371B-86D5-9BC9-1E2BF184CB75}"/>
+              </a:ext>
+            </a:extLst>
+          </p:cNvPr>
+          <p:cNvSpPr>
+            <a:spLocks noGrp="1"/>
+          </p:cNvSpPr>
+          <p:nvPr>
+            <p:ph type="body" idx="1"/>
           </p:nvPr>
         </p:nvSpPr>
         <p:spPr/>
@@ -9609,50 +7195,119 @@
           <a:bodyPr/>
           <a:lstStyle/>
           <a:p>
-            <a:endParaRPr lang="nl-NL"/>
-          </a:p>
-        </p:txBody>
-      </p:sp>
-      <p:pic>
-        <p:nvPicPr>
-          <p:cNvPr id="8" name="Graphic 7" descr="Vergrendelen met effen opvulling">
-            <a:extLst>
-              <a:ext uri="{FF2B5EF4-FFF2-40B4-BE49-F238E27FC236}">
-                <a16:creationId xmlns:a16="http://schemas.microsoft.com/office/drawing/2014/main" id="{29DE6EF8-077E-08F5-FFC6-8CF988B766DF}"/>
-              </a:ext>
-            </a:extLst>
-          </p:cNvPr>
-          <p:cNvPicPr>
-            <a:picLocks noChangeAspect="1"/>
-          </p:cNvPicPr>
-          <p:nvPr/>
-        </p:nvPicPr>
-        <p:blipFill>
-          <a:blip r:embed="rId2">
-            <a:extLst>
-              <a:ext uri="{96DAC541-7B7A-43D3-8B79-37D633B846F1}">
-                <asvg:svgBlip xmlns:asvg="http://schemas.microsoft.com/office/drawing/2016/SVG/main" r:embed="rId3"/>
-              </a:ext>
-            </a:extLst>
-          </a:blip>
-          <a:stretch>
-            <a:fillRect/>
-          </a:stretch>
-        </p:blipFill>
-        <p:spPr>
-          <a:xfrm>
-            <a:off x="8194622" y="2630191"/>
-            <a:ext cx="2808157" cy="2808157"/>
-          </a:xfrm>
-          <a:prstGeom prst="rect">
-            <a:avLst/>
-          </a:prstGeom>
-        </p:spPr>
-      </p:pic>
+            <a:r>
+              <a:rPr lang="nl-NL" dirty="0"/>
+              <a:t>Wachtwoord beveiliging</a:t>
+            </a:r>
+          </a:p>
+        </p:txBody>
+      </p:sp>
+      <p:sp>
+        <p:nvSpPr>
+          <p:cNvPr id="9" name="Tijdelijke aanduiding voor inhoud 8">
+            <a:extLst>
+              <a:ext uri="{FF2B5EF4-FFF2-40B4-BE49-F238E27FC236}">
+                <a16:creationId xmlns:a16="http://schemas.microsoft.com/office/drawing/2014/main" id="{067380F8-675C-C67C-D2EA-B24700C5CDF8}"/>
+              </a:ext>
+            </a:extLst>
+          </p:cNvPr>
+          <p:cNvSpPr>
+            <a:spLocks noGrp="1"/>
+          </p:cNvSpPr>
+          <p:nvPr>
+            <p:ph sz="half" idx="2"/>
+          </p:nvPr>
+        </p:nvSpPr>
+        <p:spPr/>
+        <p:txBody>
+          <a:bodyPr/>
+          <a:lstStyle/>
+          <a:p>
+            <a:r>
+              <a:rPr lang="nl-NL" dirty="0"/>
+              <a:t>Het minste dat erin moet zitten is een wachtwoord dat niet “root” of “password” of 1234 is</a:t>
+            </a:r>
+          </a:p>
+          <a:p>
+            <a:r>
+              <a:rPr lang="nl-NL" dirty="0"/>
+              <a:t>Sterke wachtwoorden beschermen al een klein deel van je data.</a:t>
+            </a:r>
+          </a:p>
+        </p:txBody>
+      </p:sp>
+      <p:sp>
+        <p:nvSpPr>
+          <p:cNvPr id="10" name="Tijdelijke aanduiding voor tekst 9">
+            <a:extLst>
+              <a:ext uri="{FF2B5EF4-FFF2-40B4-BE49-F238E27FC236}">
+                <a16:creationId xmlns:a16="http://schemas.microsoft.com/office/drawing/2014/main" id="{3D54475E-7F45-2338-C98F-43D0CEC8E605}"/>
+              </a:ext>
+            </a:extLst>
+          </p:cNvPr>
+          <p:cNvSpPr>
+            <a:spLocks noGrp="1"/>
+          </p:cNvSpPr>
+          <p:nvPr>
+            <p:ph type="body" sz="quarter" idx="3"/>
+          </p:nvPr>
+        </p:nvSpPr>
+        <p:spPr/>
+        <p:txBody>
+          <a:bodyPr/>
+          <a:lstStyle/>
+          <a:p>
+            <a:r>
+              <a:rPr lang="nl-NL" dirty="0"/>
+              <a:t>Toegang tot specifieke datasets</a:t>
+            </a:r>
+          </a:p>
+        </p:txBody>
+      </p:sp>
+      <p:sp>
+        <p:nvSpPr>
+          <p:cNvPr id="11" name="Tijdelijke aanduiding voor inhoud 10">
+            <a:extLst>
+              <a:ext uri="{FF2B5EF4-FFF2-40B4-BE49-F238E27FC236}">
+                <a16:creationId xmlns:a16="http://schemas.microsoft.com/office/drawing/2014/main" id="{C0561236-1B2C-308C-EE15-44B6CA42E158}"/>
+              </a:ext>
+            </a:extLst>
+          </p:cNvPr>
+          <p:cNvSpPr>
+            <a:spLocks noGrp="1"/>
+          </p:cNvSpPr>
+          <p:nvPr>
+            <p:ph sz="quarter" idx="4"/>
+          </p:nvPr>
+        </p:nvSpPr>
+        <p:spPr/>
+        <p:txBody>
+          <a:bodyPr/>
+          <a:lstStyle/>
+          <a:p>
+            <a:r>
+              <a:rPr lang="nl-NL" dirty="0"/>
+              <a:t>Verleen alleen toegang tot data die absoluut nodig is. </a:t>
+            </a:r>
+          </a:p>
+          <a:p>
+            <a:r>
+              <a:rPr lang="nl-NL" dirty="0"/>
+              <a:t>Als de klanten de film namen nodig heeft, geef ze dan niet ook toegang tot klantrekeningnummers</a:t>
+            </a:r>
+          </a:p>
+          <a:p>
+            <a:r>
+              <a:rPr lang="nl-NL" dirty="0"/>
+              <a:t>Map uit wie wat nodig heeft.</a:t>
+            </a:r>
+          </a:p>
+        </p:txBody>
+      </p:sp>
     </p:spTree>
     <p:extLst>
       <p:ext uri="{BB962C8B-B14F-4D97-AF65-F5344CB8AC3E}">
-        <p14:creationId xmlns:p14="http://schemas.microsoft.com/office/powerpoint/2010/main" val="790735972"/>
+        <p14:creationId xmlns:p14="http://schemas.microsoft.com/office/powerpoint/2010/main" val="3589108921"/>
       </p:ext>
     </p:extLst>
   </p:cSld>
@@ -9684,7 +7339,7 @@
           <p:cNvPr id="2" name="Titel 1">
             <a:extLst>
               <a:ext uri="{FF2B5EF4-FFF2-40B4-BE49-F238E27FC236}">
-                <a16:creationId xmlns:a16="http://schemas.microsoft.com/office/drawing/2014/main" id="{E5D2C17A-8918-96E6-ADFA-B8A65646FB4D}"/>
+                <a16:creationId xmlns:a16="http://schemas.microsoft.com/office/drawing/2014/main" id="{89C1125D-4CA1-EF9B-21E6-BD429B9BC95F}"/>
               </a:ext>
             </a:extLst>
           </p:cNvPr>
@@ -9695,96 +7350,138 @@
             <p:ph type="title"/>
           </p:nvPr>
         </p:nvSpPr>
-        <p:spPr/>
-        <p:txBody>
-          <a:bodyPr/>
-          <a:lstStyle/>
-          <a:p>
-            <a:r>
-              <a:rPr lang="nl-NL" dirty="0"/>
-              <a:t>Database security – werkvorm – </a:t>
-            </a:r>
-            <a:r>
-              <a:rPr lang="nl-NL"/>
-              <a:t>5 minuten </a:t>
-            </a:r>
-            <a:endParaRPr lang="nl-NL" dirty="0"/>
-          </a:p>
-        </p:txBody>
-      </p:sp>
+        <p:spPr>
+          <a:xfrm>
+            <a:off x="838200" y="365125"/>
+            <a:ext cx="10515600" cy="1325563"/>
+          </a:xfrm>
+        </p:spPr>
+        <p:txBody>
+          <a:bodyPr anchor="ctr">
+            <a:normAutofit/>
+          </a:bodyPr>
+          <a:lstStyle/>
+          <a:p>
+            <a:r>
+              <a:rPr lang="nl-NL" dirty="0"/>
+              <a:t>Rollen en rechten</a:t>
+            </a:r>
+          </a:p>
+        </p:txBody>
+      </p:sp>
+      <p:pic>
+        <p:nvPicPr>
+          <p:cNvPr id="5" name="Graphic 4" descr="Werknemersbadge met effen opvulling">
+            <a:extLst>
+              <a:ext uri="{FF2B5EF4-FFF2-40B4-BE49-F238E27FC236}">
+                <a16:creationId xmlns:a16="http://schemas.microsoft.com/office/drawing/2014/main" id="{2AC91571-78AA-3F0F-EB3D-75329001C6C5}"/>
+              </a:ext>
+            </a:extLst>
+          </p:cNvPr>
+          <p:cNvPicPr>
+            <a:picLocks noChangeAspect="1"/>
+          </p:cNvPicPr>
+          <p:nvPr/>
+        </p:nvPicPr>
+        <p:blipFill>
+          <a:blip r:embed="rId2">
+            <a:extLst>
+              <a:ext uri="{96DAC541-7B7A-43D3-8B79-37D633B846F1}">
+                <asvg:svgBlip xmlns:asvg="http://schemas.microsoft.com/office/drawing/2016/SVG/main" r:embed="rId3"/>
+              </a:ext>
+            </a:extLst>
+          </a:blip>
+          <a:stretch>
+            <a:fillRect/>
+          </a:stretch>
+        </p:blipFill>
+        <p:spPr>
+          <a:xfrm>
+            <a:off x="1419708" y="1825625"/>
+            <a:ext cx="4018584" cy="4018584"/>
+          </a:xfrm>
+          <a:prstGeom prst="rect">
+            <a:avLst/>
+          </a:prstGeom>
+        </p:spPr>
+      </p:pic>
       <p:sp>
         <p:nvSpPr>
           <p:cNvPr id="3" name="Tijdelijke aanduiding voor inhoud 2">
             <a:extLst>
               <a:ext uri="{FF2B5EF4-FFF2-40B4-BE49-F238E27FC236}">
-                <a16:creationId xmlns:a16="http://schemas.microsoft.com/office/drawing/2014/main" id="{25D5354A-699D-E9FA-886F-1842F64CD596}"/>
-              </a:ext>
-            </a:extLst>
-          </p:cNvPr>
-          <p:cNvSpPr>
-            <a:spLocks noGrp="1"/>
-          </p:cNvSpPr>
-          <p:nvPr>
-            <p:ph idx="1"/>
-          </p:nvPr>
-        </p:nvSpPr>
-        <p:spPr/>
+                <a16:creationId xmlns:a16="http://schemas.microsoft.com/office/drawing/2014/main" id="{11AFA5FA-0318-9C06-8412-B30BD730015B}"/>
+              </a:ext>
+            </a:extLst>
+          </p:cNvPr>
+          <p:cNvSpPr>
+            <a:spLocks noGrp="1"/>
+          </p:cNvSpPr>
+          <p:nvPr>
+            <p:ph sz="half" idx="2"/>
+          </p:nvPr>
+        </p:nvSpPr>
+        <p:spPr>
+          <a:xfrm>
+            <a:off x="6172200" y="1825625"/>
+            <a:ext cx="5181600" cy="4018584"/>
+          </a:xfrm>
+        </p:spPr>
         <p:txBody>
           <a:bodyPr>
-            <a:normAutofit fontScale="92500" lnSpcReduction="10000"/>
+            <a:normAutofit/>
           </a:bodyPr>
           <a:lstStyle/>
           <a:p>
             <a:r>
-              <a:rPr lang="nl-NL" dirty="0"/>
-              <a:t>Iedereen heeft een kaartje met een D, K of H erop. </a:t>
-            </a:r>
-          </a:p>
-          <a:p>
-            <a:r>
-              <a:rPr lang="nl-NL" dirty="0"/>
-              <a:t>Sommige zijn klanten (K) en sommige hackers (H)</a:t>
-            </a:r>
-          </a:p>
-          <a:p>
-            <a:r>
-              <a:rPr lang="nl-NL" dirty="0"/>
-              <a:t>Developers (D) hebben het wachtwoord</a:t>
-            </a:r>
-          </a:p>
-          <a:p>
-            <a:r>
-              <a:rPr lang="nl-NL" dirty="0"/>
-              <a:t>Klanten en hackers willen het wachtwoord om data te krijgen van de database (Docent)</a:t>
-            </a:r>
-          </a:p>
-          <a:p>
-            <a:r>
-              <a:rPr lang="nl-NL" dirty="0"/>
-              <a:t>Hackers moeten zich voordoen als Klanten, wordt je ontmaskert ben je uit.</a:t>
-            </a:r>
-          </a:p>
-          <a:p>
-            <a:r>
-              <a:rPr lang="nl-NL" dirty="0"/>
-              <a:t>Hackers en Klanten doel: verkrijg Data</a:t>
-            </a:r>
-          </a:p>
-          <a:p>
-            <a:r>
-              <a:rPr lang="nl-NL" dirty="0"/>
-              <a:t>Developers doel: geef klanten toegang maar niet de Hackers</a:t>
-            </a:r>
-          </a:p>
-          <a:p>
-            <a:endParaRPr lang="nl-NL" dirty="0"/>
+              <a:rPr lang="nl-NL" sz="2200" dirty="0"/>
+              <a:t>Je kan rollen/</a:t>
+            </a:r>
+            <a:r>
+              <a:rPr lang="nl-NL" sz="2200" dirty="0" err="1"/>
+              <a:t>Gebruikerprofielen</a:t>
+            </a:r>
+            <a:r>
+              <a:rPr lang="nl-NL" sz="2200" dirty="0"/>
+              <a:t> maken voor een database.</a:t>
+            </a:r>
+          </a:p>
+          <a:p>
+            <a:r>
+              <a:rPr lang="nl-NL" sz="2200" dirty="0"/>
+              <a:t>Deze rollen bevatten bepaalde rechten zoals:</a:t>
+            </a:r>
+          </a:p>
+          <a:p>
+            <a:pPr lvl="1"/>
+            <a:r>
+              <a:rPr lang="nl-NL" sz="2200" dirty="0"/>
+              <a:t>Of dit type gebruiker mag toevoegen, verwijderen of wijzigen.</a:t>
+            </a:r>
+          </a:p>
+          <a:p>
+            <a:pPr lvl="1"/>
+            <a:r>
+              <a:rPr lang="nl-NL" sz="2200" dirty="0"/>
+              <a:t>Welke tabellen dit type gebruiker mag inzien.</a:t>
+            </a:r>
+          </a:p>
+          <a:p>
+            <a:pPr lvl="1"/>
+            <a:r>
+              <a:rPr lang="nl-NL" sz="2200" dirty="0"/>
+              <a:t>Of de gebruiker op grote schaal aanpassingen mag maken.</a:t>
+            </a:r>
+          </a:p>
+          <a:p>
+            <a:endParaRPr lang="nl-NL" sz="2200" dirty="0"/>
           </a:p>
         </p:txBody>
       </p:sp>
     </p:spTree>
     <p:extLst>
       <p:ext uri="{BB962C8B-B14F-4D97-AF65-F5344CB8AC3E}">
-        <p14:creationId xmlns:p14="http://schemas.microsoft.com/office/powerpoint/2010/main" val="3166467875"/>
+        <p14:creationId xmlns:p14="http://schemas.microsoft.com/office/powerpoint/2010/main" val="3937316746"/>
       </p:ext>
     </p:extLst>
   </p:cSld>
